--- a/Mapped Curriculum Lessons/Grade 7/Lesson 25 - Working Through Lists/Working Through Lists - Slides.pptx
+++ b/Mapped Curriculum Lessons/Grade 7/Lesson 25 - Working Through Lists/Working Through Lists - Slides.pptx
@@ -2,28 +2,28 @@
 <file path=ppt/presentation.xml><?xml version="1.0" encoding="utf-8"?>
 <p:presentation xmlns:p="http://schemas.openxmlformats.org/presentationml/2006/main" embedTrueTypeFonts="1" saveSubsetFonts="0">
   <p:sldMasterIdLst>
-    <p:sldMasterId xmlns:r="http://schemas.openxmlformats.org/officeDocument/2006/relationships" id="2147483648" r:id="Rca5773c9bb334d9f"/>
+    <p:sldMasterId xmlns:r="http://schemas.openxmlformats.org/officeDocument/2006/relationships" id="2147483648" r:id="Rf77ed56ae4d14502"/>
   </p:sldMasterIdLst>
   <p:notesMasterIdLst>
-    <p:notesMasterId xmlns:r="http://schemas.openxmlformats.org/officeDocument/2006/relationships" r:id="R26a63be24fe9424c"/>
+    <p:notesMasterId xmlns:r="http://schemas.openxmlformats.org/officeDocument/2006/relationships" r:id="R57d2bd5bd0004b00"/>
   </p:notesMasterIdLst>
   <p:sldIdLst>
-    <p:sldId xmlns:r="http://schemas.openxmlformats.org/officeDocument/2006/relationships" id="256" r:id="R56040e92d1ac4b3a"/>
-    <p:sldId xmlns:r="http://schemas.openxmlformats.org/officeDocument/2006/relationships" id="257" r:id="Rc6d2c19a99fd4072"/>
-    <p:sldId xmlns:r="http://schemas.openxmlformats.org/officeDocument/2006/relationships" id="258" r:id="R6e41ea1974134db5"/>
-    <p:sldId xmlns:r="http://schemas.openxmlformats.org/officeDocument/2006/relationships" id="259" r:id="Rdb337182f7624306"/>
-    <p:sldId xmlns:r="http://schemas.openxmlformats.org/officeDocument/2006/relationships" id="260" r:id="Rf57ab83f37ac4ede"/>
-    <p:sldId xmlns:r="http://schemas.openxmlformats.org/officeDocument/2006/relationships" id="261" r:id="Rd8204521935d4dcd"/>
-    <p:sldId xmlns:r="http://schemas.openxmlformats.org/officeDocument/2006/relationships" id="262" r:id="R55cebc30adaa45a3"/>
-    <p:sldId xmlns:r="http://schemas.openxmlformats.org/officeDocument/2006/relationships" id="263" r:id="R2bdbd2e81a6945d8"/>
-    <p:sldId xmlns:r="http://schemas.openxmlformats.org/officeDocument/2006/relationships" id="264" r:id="R3633c0a8d03d42d9"/>
+    <p:sldId xmlns:r="http://schemas.openxmlformats.org/officeDocument/2006/relationships" id="256" r:id="R9c8b3c4570384348"/>
+    <p:sldId xmlns:r="http://schemas.openxmlformats.org/officeDocument/2006/relationships" id="257" r:id="R75b47a86aea146c1"/>
+    <p:sldId xmlns:r="http://schemas.openxmlformats.org/officeDocument/2006/relationships" id="258" r:id="Re951cfa8257b4fde"/>
+    <p:sldId xmlns:r="http://schemas.openxmlformats.org/officeDocument/2006/relationships" id="259" r:id="Rdcd9a3ba61a04586"/>
+    <p:sldId xmlns:r="http://schemas.openxmlformats.org/officeDocument/2006/relationships" id="260" r:id="R64663a3cdbe34c2d"/>
+    <p:sldId xmlns:r="http://schemas.openxmlformats.org/officeDocument/2006/relationships" id="261" r:id="Re3505b7c1b154476"/>
+    <p:sldId xmlns:r="http://schemas.openxmlformats.org/officeDocument/2006/relationships" id="262" r:id="R225e63defce447e7"/>
+    <p:sldId xmlns:r="http://schemas.openxmlformats.org/officeDocument/2006/relationships" id="263" r:id="R1839a96a9c184760"/>
+    <p:sldId xmlns:r="http://schemas.openxmlformats.org/officeDocument/2006/relationships" id="264" r:id="R71bfb72056c64e62"/>
   </p:sldIdLst>
   <p:sldSz cx="12192000" cy="6858000"/>
   <p:notesSz cx="6858000" cy="9144000"/>
   <p:embeddedFontLst>
     <p:embeddedFont>
       <p:font typeface="JetBrains Mono"/>
-      <p:regular xmlns:r="http://schemas.openxmlformats.org/officeDocument/2006/relationships" r:id="Raa0b668355584e19"/>
+      <p:regular xmlns:r="http://schemas.openxmlformats.org/officeDocument/2006/relationships" r:id="Rbfcca3a28d124f40"/>
     </p:embeddedFont>
   </p:embeddedFontLst>
 </p:presentation>
@@ -1071,7 +1071,7 @@
           <p:nvPr/>
         </p:nvPicPr>
         <p:blipFill rotWithShape="1">
-          <a:blip xmlns:r="http://schemas.openxmlformats.org/officeDocument/2006/relationships" xmlns:a="http://schemas.openxmlformats.org/drawingml/2006/main" r:embed="Ra9d26449cddc46cf"/>
+          <a:blip xmlns:r="http://schemas.openxmlformats.org/officeDocument/2006/relationships" xmlns:a="http://schemas.openxmlformats.org/drawingml/2006/main" r:embed="Rd9f6623c8c6444fc"/>
           <a:stretch xmlns:a="http://schemas.openxmlformats.org/drawingml/2006/main"/>
         </p:blipFill>
         <p:spPr>
@@ -1451,7 +1451,7 @@
           <p:nvPr/>
         </p:nvPicPr>
         <p:blipFill rotWithShape="1">
-          <a:blip xmlns:r="http://schemas.openxmlformats.org/officeDocument/2006/relationships" xmlns:a="http://schemas.openxmlformats.org/drawingml/2006/main" r:embed="R5dc3e05f5dea4fd1">
+          <a:blip xmlns:r="http://schemas.openxmlformats.org/officeDocument/2006/relationships" xmlns:a="http://schemas.openxmlformats.org/drawingml/2006/main" r:embed="Re665278db8614329">
             <a:alphaModFix amt="28000"/>
           </a:blip>
           <a:stretch xmlns:a="http://schemas.openxmlformats.org/drawingml/2006/main"/>
@@ -1664,7 +1664,7 @@
           <p:nvPr/>
         </p:nvPicPr>
         <p:blipFill rotWithShape="1">
-          <a:blip xmlns:r="http://schemas.openxmlformats.org/officeDocument/2006/relationships" xmlns:a="http://schemas.openxmlformats.org/drawingml/2006/main" r:embed="R5078ec78d7b44f06">
+          <a:blip xmlns:r="http://schemas.openxmlformats.org/officeDocument/2006/relationships" xmlns:a="http://schemas.openxmlformats.org/drawingml/2006/main" r:embed="Rc815fc8f014f4460">
             <a:alphaModFix amt="28000"/>
           </a:blip>
           <a:stretch xmlns:a="http://schemas.openxmlformats.org/drawingml/2006/main"/>
@@ -1899,7 +1899,7 @@
           <p:nvPr/>
         </p:nvPicPr>
         <p:blipFill rotWithShape="1">
-          <a:blip xmlns:r="http://schemas.openxmlformats.org/officeDocument/2006/relationships" xmlns:a="http://schemas.openxmlformats.org/drawingml/2006/main" r:embed="Rb8815f94a1b14e56">
+          <a:blip xmlns:r="http://schemas.openxmlformats.org/officeDocument/2006/relationships" xmlns:a="http://schemas.openxmlformats.org/drawingml/2006/main" r:embed="Rc6dc664cfdd9429e">
             <a:alphaModFix amt="28000"/>
           </a:blip>
           <a:stretch xmlns:a="http://schemas.openxmlformats.org/drawingml/2006/main"/>
@@ -2176,7 +2176,7 @@
           <p:nvPr/>
         </p:nvPicPr>
         <p:blipFill rotWithShape="1">
-          <a:blip xmlns:r="http://schemas.openxmlformats.org/officeDocument/2006/relationships" xmlns:a="http://schemas.openxmlformats.org/drawingml/2006/main" r:embed="R62578a889a964ac2">
+          <a:blip xmlns:r="http://schemas.openxmlformats.org/officeDocument/2006/relationships" xmlns:a="http://schemas.openxmlformats.org/drawingml/2006/main" r:embed="R9d52d391c1f446fc">
             <a:alphaModFix amt="28000"/>
           </a:blip>
           <a:stretch xmlns:a="http://schemas.openxmlformats.org/drawingml/2006/main"/>
@@ -2451,7 +2451,7 @@
           <p:nvPr/>
         </p:nvPicPr>
         <p:blipFill rotWithShape="1">
-          <a:blip xmlns:r="http://schemas.openxmlformats.org/officeDocument/2006/relationships" xmlns:a="http://schemas.openxmlformats.org/drawingml/2006/main" r:embed="R365028e26a3e4b27">
+          <a:blip xmlns:r="http://schemas.openxmlformats.org/officeDocument/2006/relationships" xmlns:a="http://schemas.openxmlformats.org/drawingml/2006/main" r:embed="R8124ded6cea64514">
             <a:alphaModFix amt="28000"/>
           </a:blip>
           <a:stretch xmlns:a="http://schemas.openxmlformats.org/drawingml/2006/main"/>
@@ -2875,7 +2875,7 @@
           <p:nvPr/>
         </p:nvPicPr>
         <p:blipFill rotWithShape="1">
-          <a:blip xmlns:r="http://schemas.openxmlformats.org/officeDocument/2006/relationships" xmlns:a="http://schemas.openxmlformats.org/drawingml/2006/main" r:embed="R4c4b83d418454390">
+          <a:blip xmlns:r="http://schemas.openxmlformats.org/officeDocument/2006/relationships" xmlns:a="http://schemas.openxmlformats.org/drawingml/2006/main" r:embed="R1ba8f2b38a4a4546">
             <a:alphaModFix amt="28000"/>
           </a:blip>
           <a:stretch xmlns:a="http://schemas.openxmlformats.org/drawingml/2006/main"/>
@@ -3016,7 +3016,7 @@
           <p:nvPr/>
         </p:nvPicPr>
         <p:blipFill rotWithShape="1">
-          <a:blip xmlns:r="http://schemas.openxmlformats.org/officeDocument/2006/relationships" xmlns:a="http://schemas.openxmlformats.org/drawingml/2006/main" r:embed="Ra8bfdf707fba4f6e">
+          <a:blip xmlns:r="http://schemas.openxmlformats.org/officeDocument/2006/relationships" xmlns:a="http://schemas.openxmlformats.org/drawingml/2006/main" r:embed="R69282109d0db467e">
             <a:alphaModFix amt="28000"/>
           </a:blip>
           <a:stretch xmlns:a="http://schemas.openxmlformats.org/drawingml/2006/main"/>
@@ -3130,7 +3130,7 @@
           <p:nvPr/>
         </p:nvPicPr>
         <p:blipFill rotWithShape="1">
-          <a:blip xmlns:r="http://schemas.openxmlformats.org/officeDocument/2006/relationships" xmlns:a="http://schemas.openxmlformats.org/drawingml/2006/main" r:embed="Rb723ff7dd1f14803">
+          <a:blip xmlns:r="http://schemas.openxmlformats.org/officeDocument/2006/relationships" xmlns:a="http://schemas.openxmlformats.org/drawingml/2006/main" r:embed="R4989b289198546af">
             <a:alphaModFix amt="28000"/>
           </a:blip>
           <a:stretch xmlns:a="http://schemas.openxmlformats.org/drawingml/2006/main"/>
@@ -3457,7 +3457,7 @@
           <p:nvPr/>
         </p:nvPicPr>
         <p:blipFill rotWithShape="1">
-          <a:blip xmlns:r="http://schemas.openxmlformats.org/officeDocument/2006/relationships" xmlns:a="http://schemas.openxmlformats.org/drawingml/2006/main" r:embed="R8459a65b3a894254">
+          <a:blip xmlns:r="http://schemas.openxmlformats.org/officeDocument/2006/relationships" xmlns:a="http://schemas.openxmlformats.org/drawingml/2006/main" r:embed="Rf5831e41ed7944dc">
             <a:alphaModFix amt="28000"/>
           </a:blip>
           <a:stretch xmlns:a="http://schemas.openxmlformats.org/drawingml/2006/main"/>
@@ -3745,7 +3745,7 @@
           <p:nvPr/>
         </p:nvPicPr>
         <p:blipFill rotWithShape="1">
-          <a:blip xmlns:r="http://schemas.openxmlformats.org/officeDocument/2006/relationships" xmlns:a="http://schemas.openxmlformats.org/drawingml/2006/main" r:embed="Re21087f888ab4e8e">
+          <a:blip xmlns:r="http://schemas.openxmlformats.org/officeDocument/2006/relationships" xmlns:a="http://schemas.openxmlformats.org/drawingml/2006/main" r:embed="R805b1196b5994212">
             <a:alphaModFix amt="28000"/>
           </a:blip>
           <a:stretch xmlns:a="http://schemas.openxmlformats.org/drawingml/2006/main"/>
@@ -3982,17 +3982,17 @@
   </p:cSld>
   <p:clrMap bg1="lt1" tx1="dk1" bg2="lt2" tx2="dk2" accent1="accent1" accent2="accent2" accent3="accent3" accent4="accent4" accent5="accent5" accent6="accent6" hlink="hlink" folHlink="folHlink"/>
   <p:sldLayoutIdLst>
-    <p:sldLayoutId xmlns:r="http://schemas.openxmlformats.org/officeDocument/2006/relationships" id="2147483649" r:id="R1568ef1925764fad"/>
-    <p:sldLayoutId xmlns:r="http://schemas.openxmlformats.org/officeDocument/2006/relationships" id="2147483650" r:id="Rcacccb1e89d34a8b"/>
-    <p:sldLayoutId xmlns:r="http://schemas.openxmlformats.org/officeDocument/2006/relationships" id="2147483651" r:id="R2e90a8187ef44efc"/>
-    <p:sldLayoutId xmlns:r="http://schemas.openxmlformats.org/officeDocument/2006/relationships" id="2147483652" r:id="Rbff703374feb4f18"/>
-    <p:sldLayoutId xmlns:r="http://schemas.openxmlformats.org/officeDocument/2006/relationships" id="2147483653" r:id="Rdc8b1e33a54f4a33"/>
-    <p:sldLayoutId xmlns:r="http://schemas.openxmlformats.org/officeDocument/2006/relationships" id="2147483654" r:id="Ra1745a303b0f4584"/>
-    <p:sldLayoutId xmlns:r="http://schemas.openxmlformats.org/officeDocument/2006/relationships" id="2147483655" r:id="Ref3b00c8d3ae4092"/>
-    <p:sldLayoutId xmlns:r="http://schemas.openxmlformats.org/officeDocument/2006/relationships" id="2147483656" r:id="R4b2774ae16094106"/>
-    <p:sldLayoutId xmlns:r="http://schemas.openxmlformats.org/officeDocument/2006/relationships" id="2147483657" r:id="R4932d626f5064deb"/>
-    <p:sldLayoutId xmlns:r="http://schemas.openxmlformats.org/officeDocument/2006/relationships" id="2147483658" r:id="R1fb7b0a0a109429b"/>
-    <p:sldLayoutId xmlns:r="http://schemas.openxmlformats.org/officeDocument/2006/relationships" id="2147483659" r:id="R957725ad50334cfc"/>
+    <p:sldLayoutId xmlns:r="http://schemas.openxmlformats.org/officeDocument/2006/relationships" id="2147483649" r:id="Raf7b607ff0074ea5"/>
+    <p:sldLayoutId xmlns:r="http://schemas.openxmlformats.org/officeDocument/2006/relationships" id="2147483650" r:id="Rdeb99e95bd80470b"/>
+    <p:sldLayoutId xmlns:r="http://schemas.openxmlformats.org/officeDocument/2006/relationships" id="2147483651" r:id="R6ac6502593b24933"/>
+    <p:sldLayoutId xmlns:r="http://schemas.openxmlformats.org/officeDocument/2006/relationships" id="2147483652" r:id="R4d0a4a56fd3c40fb"/>
+    <p:sldLayoutId xmlns:r="http://schemas.openxmlformats.org/officeDocument/2006/relationships" id="2147483653" r:id="Rfbee899ac34b4e52"/>
+    <p:sldLayoutId xmlns:r="http://schemas.openxmlformats.org/officeDocument/2006/relationships" id="2147483654" r:id="R8f82c0f5d27244a6"/>
+    <p:sldLayoutId xmlns:r="http://schemas.openxmlformats.org/officeDocument/2006/relationships" id="2147483655" r:id="R69f3afd26a1d4e32"/>
+    <p:sldLayoutId xmlns:r="http://schemas.openxmlformats.org/officeDocument/2006/relationships" id="2147483656" r:id="Rc792beebe183417a"/>
+    <p:sldLayoutId xmlns:r="http://schemas.openxmlformats.org/officeDocument/2006/relationships" id="2147483657" r:id="R4950c6b56d564ffa"/>
+    <p:sldLayoutId xmlns:r="http://schemas.openxmlformats.org/officeDocument/2006/relationships" id="2147483658" r:id="R8dd042f9144249ef"/>
+    <p:sldLayoutId xmlns:r="http://schemas.openxmlformats.org/officeDocument/2006/relationships" id="2147483659" r:id="Rc1825d05d0c9402d"/>
   </p:sldLayoutIdLst>
   <p:hf hdr="0" ftr="0" dt="0"/>
   <p:txStyles>
@@ -7183,29 +7183,7 @@
                 <a:ea typeface="Calibri"/>
                 <a:cs typeface="Calibri"/>
               </a:rPr>
-              <a:t> must display TEA, WATER and JUICE before </a:t>
-            </a:r>
-            <a:r>
-              <a:rPr sz="2400" b="0">
-                <a:solidFill>
-                  <a:srgbClr val="067D17"/>
-                </a:solidFill>
-                <a:latin typeface="JetBrains Mono"/>
-                <a:ea typeface="JetBrains Mono"/>
-                <a:cs typeface="JetBrains Mono"/>
-              </a:rPr>
-              <a:t>"Total drinks:"</a:t>
-            </a:r>
-            <a:r>
-              <a:rPr sz="2400" b="0">
-                <a:solidFill>
-                  <a:srgbClr val="080808"/>
-                </a:solidFill>
-                <a:latin typeface="Calibri"/>
-                <a:ea typeface="Calibri"/>
-                <a:cs typeface="Calibri"/>
-              </a:rPr>
-              <a:t> 3.</a:t>
+              <a:t> must display TEA, WATER and JUICE before Total drinks: 3.</a:t>
             </a:r>
           </a:p>
         </p:txBody>
@@ -7874,29 +7852,7 @@
                 <a:ea typeface="Calibri"/>
                 <a:cs typeface="Calibri"/>
               </a:rPr>
-              <a:t>. Before running, p</a:t>
-            </a:r>
-            <a:r>
-              <a:rPr sz="2400" b="0">
-                <a:solidFill>
-                  <a:srgbClr val="067D17"/>
-                </a:solidFill>
-                <a:latin typeface="JetBrains Mono"/>
-                <a:ea typeface="JetBrains Mono"/>
-                <a:cs typeface="JetBrains Mono"/>
-              </a:rPr>
-              <a:t>"red"</a:t>
-            </a:r>
-            <a:r>
-              <a:rPr sz="2400" b="0">
-                <a:solidFill>
-                  <a:srgbClr val="080808"/>
-                </a:solidFill>
-                <a:latin typeface="Calibri"/>
-                <a:ea typeface="Calibri"/>
-                <a:cs typeface="Calibri"/>
-              </a:rPr>
-              <a:t>ict the last answer and the total that will appear; then check both.</a:t>
+              <a:t>. Before running, predict the last answer and the total that will appear; then check both.</a:t>
             </a:r>
           </a:p>
         </p:txBody>

--- a/Mapped Curriculum Lessons/Grade 7/Lesson 25 - Working Through Lists/Working Through Lists - Slides.pptx
+++ b/Mapped Curriculum Lessons/Grade 7/Lesson 25 - Working Through Lists/Working Through Lists - Slides.pptx
@@ -2,28 +2,28 @@
 <file path=ppt/presentation.xml><?xml version="1.0" encoding="utf-8"?>
 <p:presentation xmlns:p="http://schemas.openxmlformats.org/presentationml/2006/main" embedTrueTypeFonts="1" saveSubsetFonts="0">
   <p:sldMasterIdLst>
-    <p:sldMasterId xmlns:r="http://schemas.openxmlformats.org/officeDocument/2006/relationships" id="2147483648" r:id="Rf77ed56ae4d14502"/>
+    <p:sldMasterId xmlns:r="http://schemas.openxmlformats.org/officeDocument/2006/relationships" id="2147483648" r:id="R620a337c67ea406e"/>
   </p:sldMasterIdLst>
   <p:notesMasterIdLst>
-    <p:notesMasterId xmlns:r="http://schemas.openxmlformats.org/officeDocument/2006/relationships" r:id="R57d2bd5bd0004b00"/>
+    <p:notesMasterId xmlns:r="http://schemas.openxmlformats.org/officeDocument/2006/relationships" r:id="R8be4fecff4f04174"/>
   </p:notesMasterIdLst>
   <p:sldIdLst>
-    <p:sldId xmlns:r="http://schemas.openxmlformats.org/officeDocument/2006/relationships" id="256" r:id="R9c8b3c4570384348"/>
-    <p:sldId xmlns:r="http://schemas.openxmlformats.org/officeDocument/2006/relationships" id="257" r:id="R75b47a86aea146c1"/>
-    <p:sldId xmlns:r="http://schemas.openxmlformats.org/officeDocument/2006/relationships" id="258" r:id="Re951cfa8257b4fde"/>
-    <p:sldId xmlns:r="http://schemas.openxmlformats.org/officeDocument/2006/relationships" id="259" r:id="Rdcd9a3ba61a04586"/>
-    <p:sldId xmlns:r="http://schemas.openxmlformats.org/officeDocument/2006/relationships" id="260" r:id="R64663a3cdbe34c2d"/>
-    <p:sldId xmlns:r="http://schemas.openxmlformats.org/officeDocument/2006/relationships" id="261" r:id="Re3505b7c1b154476"/>
-    <p:sldId xmlns:r="http://schemas.openxmlformats.org/officeDocument/2006/relationships" id="262" r:id="R225e63defce447e7"/>
-    <p:sldId xmlns:r="http://schemas.openxmlformats.org/officeDocument/2006/relationships" id="263" r:id="R1839a96a9c184760"/>
-    <p:sldId xmlns:r="http://schemas.openxmlformats.org/officeDocument/2006/relationships" id="264" r:id="R71bfb72056c64e62"/>
+    <p:sldId xmlns:r="http://schemas.openxmlformats.org/officeDocument/2006/relationships" id="256" r:id="R6ffd504317234103"/>
+    <p:sldId xmlns:r="http://schemas.openxmlformats.org/officeDocument/2006/relationships" id="257" r:id="Rf2c752e5422f477b"/>
+    <p:sldId xmlns:r="http://schemas.openxmlformats.org/officeDocument/2006/relationships" id="258" r:id="Rf5cf5241351f4367"/>
+    <p:sldId xmlns:r="http://schemas.openxmlformats.org/officeDocument/2006/relationships" id="259" r:id="R0419367dc92e463f"/>
+    <p:sldId xmlns:r="http://schemas.openxmlformats.org/officeDocument/2006/relationships" id="260" r:id="Rf6b6d3c2d9b441b9"/>
+    <p:sldId xmlns:r="http://schemas.openxmlformats.org/officeDocument/2006/relationships" id="261" r:id="Rd365361f5b42477f"/>
+    <p:sldId xmlns:r="http://schemas.openxmlformats.org/officeDocument/2006/relationships" id="262" r:id="R30846a31c40840aa"/>
+    <p:sldId xmlns:r="http://schemas.openxmlformats.org/officeDocument/2006/relationships" id="263" r:id="R427c3fbf528049a0"/>
+    <p:sldId xmlns:r="http://schemas.openxmlformats.org/officeDocument/2006/relationships" id="264" r:id="R0d144c8a9a904f04"/>
   </p:sldIdLst>
   <p:sldSz cx="12192000" cy="6858000"/>
   <p:notesSz cx="6858000" cy="9144000"/>
   <p:embeddedFontLst>
     <p:embeddedFont>
       <p:font typeface="JetBrains Mono"/>
-      <p:regular xmlns:r="http://schemas.openxmlformats.org/officeDocument/2006/relationships" r:id="Rbfcca3a28d124f40"/>
+      <p:regular xmlns:r="http://schemas.openxmlformats.org/officeDocument/2006/relationships" r:id="Reb345a93419c4bad"/>
     </p:embeddedFont>
   </p:embeddedFontLst>
 </p:presentation>
@@ -1071,7 +1071,7 @@
           <p:nvPr/>
         </p:nvPicPr>
         <p:blipFill rotWithShape="1">
-          <a:blip xmlns:r="http://schemas.openxmlformats.org/officeDocument/2006/relationships" xmlns:a="http://schemas.openxmlformats.org/drawingml/2006/main" r:embed="Rd9f6623c8c6444fc"/>
+          <a:blip xmlns:r="http://schemas.openxmlformats.org/officeDocument/2006/relationships" xmlns:a="http://schemas.openxmlformats.org/drawingml/2006/main" r:embed="Rc0b9f001afc04b83"/>
           <a:stretch xmlns:a="http://schemas.openxmlformats.org/drawingml/2006/main"/>
         </p:blipFill>
         <p:spPr>
@@ -1451,7 +1451,7 @@
           <p:nvPr/>
         </p:nvPicPr>
         <p:blipFill rotWithShape="1">
-          <a:blip xmlns:r="http://schemas.openxmlformats.org/officeDocument/2006/relationships" xmlns:a="http://schemas.openxmlformats.org/drawingml/2006/main" r:embed="Re665278db8614329">
+          <a:blip xmlns:r="http://schemas.openxmlformats.org/officeDocument/2006/relationships" xmlns:a="http://schemas.openxmlformats.org/drawingml/2006/main" r:embed="R390674b6ce9a4d64">
             <a:alphaModFix amt="28000"/>
           </a:blip>
           <a:stretch xmlns:a="http://schemas.openxmlformats.org/drawingml/2006/main"/>
@@ -1664,7 +1664,7 @@
           <p:nvPr/>
         </p:nvPicPr>
         <p:blipFill rotWithShape="1">
-          <a:blip xmlns:r="http://schemas.openxmlformats.org/officeDocument/2006/relationships" xmlns:a="http://schemas.openxmlformats.org/drawingml/2006/main" r:embed="Rc815fc8f014f4460">
+          <a:blip xmlns:r="http://schemas.openxmlformats.org/officeDocument/2006/relationships" xmlns:a="http://schemas.openxmlformats.org/drawingml/2006/main" r:embed="R2752388e3b884f43">
             <a:alphaModFix amt="28000"/>
           </a:blip>
           <a:stretch xmlns:a="http://schemas.openxmlformats.org/drawingml/2006/main"/>
@@ -1899,7 +1899,7 @@
           <p:nvPr/>
         </p:nvPicPr>
         <p:blipFill rotWithShape="1">
-          <a:blip xmlns:r="http://schemas.openxmlformats.org/officeDocument/2006/relationships" xmlns:a="http://schemas.openxmlformats.org/drawingml/2006/main" r:embed="Rc6dc664cfdd9429e">
+          <a:blip xmlns:r="http://schemas.openxmlformats.org/officeDocument/2006/relationships" xmlns:a="http://schemas.openxmlformats.org/drawingml/2006/main" r:embed="R79f879e4c73f48db">
             <a:alphaModFix amt="28000"/>
           </a:blip>
           <a:stretch xmlns:a="http://schemas.openxmlformats.org/drawingml/2006/main"/>
@@ -2176,7 +2176,7 @@
           <p:nvPr/>
         </p:nvPicPr>
         <p:blipFill rotWithShape="1">
-          <a:blip xmlns:r="http://schemas.openxmlformats.org/officeDocument/2006/relationships" xmlns:a="http://schemas.openxmlformats.org/drawingml/2006/main" r:embed="R9d52d391c1f446fc">
+          <a:blip xmlns:r="http://schemas.openxmlformats.org/officeDocument/2006/relationships" xmlns:a="http://schemas.openxmlformats.org/drawingml/2006/main" r:embed="Rea8e0dcabb004173">
             <a:alphaModFix amt="28000"/>
           </a:blip>
           <a:stretch xmlns:a="http://schemas.openxmlformats.org/drawingml/2006/main"/>
@@ -2451,7 +2451,7 @@
           <p:nvPr/>
         </p:nvPicPr>
         <p:blipFill rotWithShape="1">
-          <a:blip xmlns:r="http://schemas.openxmlformats.org/officeDocument/2006/relationships" xmlns:a="http://schemas.openxmlformats.org/drawingml/2006/main" r:embed="R8124ded6cea64514">
+          <a:blip xmlns:r="http://schemas.openxmlformats.org/officeDocument/2006/relationships" xmlns:a="http://schemas.openxmlformats.org/drawingml/2006/main" r:embed="R256acdc9de3b4a9d">
             <a:alphaModFix amt="28000"/>
           </a:blip>
           <a:stretch xmlns:a="http://schemas.openxmlformats.org/drawingml/2006/main"/>
@@ -2875,7 +2875,7 @@
           <p:nvPr/>
         </p:nvPicPr>
         <p:blipFill rotWithShape="1">
-          <a:blip xmlns:r="http://schemas.openxmlformats.org/officeDocument/2006/relationships" xmlns:a="http://schemas.openxmlformats.org/drawingml/2006/main" r:embed="R1ba8f2b38a4a4546">
+          <a:blip xmlns:r="http://schemas.openxmlformats.org/officeDocument/2006/relationships" xmlns:a="http://schemas.openxmlformats.org/drawingml/2006/main" r:embed="R0513a43fdcbe4c0f">
             <a:alphaModFix amt="28000"/>
           </a:blip>
           <a:stretch xmlns:a="http://schemas.openxmlformats.org/drawingml/2006/main"/>
@@ -3016,7 +3016,7 @@
           <p:nvPr/>
         </p:nvPicPr>
         <p:blipFill rotWithShape="1">
-          <a:blip xmlns:r="http://schemas.openxmlformats.org/officeDocument/2006/relationships" xmlns:a="http://schemas.openxmlformats.org/drawingml/2006/main" r:embed="R69282109d0db467e">
+          <a:blip xmlns:r="http://schemas.openxmlformats.org/officeDocument/2006/relationships" xmlns:a="http://schemas.openxmlformats.org/drawingml/2006/main" r:embed="R290789f427dd4b26">
             <a:alphaModFix amt="28000"/>
           </a:blip>
           <a:stretch xmlns:a="http://schemas.openxmlformats.org/drawingml/2006/main"/>
@@ -3130,7 +3130,7 @@
           <p:nvPr/>
         </p:nvPicPr>
         <p:blipFill rotWithShape="1">
-          <a:blip xmlns:r="http://schemas.openxmlformats.org/officeDocument/2006/relationships" xmlns:a="http://schemas.openxmlformats.org/drawingml/2006/main" r:embed="R4989b289198546af">
+          <a:blip xmlns:r="http://schemas.openxmlformats.org/officeDocument/2006/relationships" xmlns:a="http://schemas.openxmlformats.org/drawingml/2006/main" r:embed="R69f73051a40041b6">
             <a:alphaModFix amt="28000"/>
           </a:blip>
           <a:stretch xmlns:a="http://schemas.openxmlformats.org/drawingml/2006/main"/>
@@ -3457,7 +3457,7 @@
           <p:nvPr/>
         </p:nvPicPr>
         <p:blipFill rotWithShape="1">
-          <a:blip xmlns:r="http://schemas.openxmlformats.org/officeDocument/2006/relationships" xmlns:a="http://schemas.openxmlformats.org/drawingml/2006/main" r:embed="Rf5831e41ed7944dc">
+          <a:blip xmlns:r="http://schemas.openxmlformats.org/officeDocument/2006/relationships" xmlns:a="http://schemas.openxmlformats.org/drawingml/2006/main" r:embed="R9ff99e7427024cb4">
             <a:alphaModFix amt="28000"/>
           </a:blip>
           <a:stretch xmlns:a="http://schemas.openxmlformats.org/drawingml/2006/main"/>
@@ -3745,7 +3745,7 @@
           <p:nvPr/>
         </p:nvPicPr>
         <p:blipFill rotWithShape="1">
-          <a:blip xmlns:r="http://schemas.openxmlformats.org/officeDocument/2006/relationships" xmlns:a="http://schemas.openxmlformats.org/drawingml/2006/main" r:embed="R805b1196b5994212">
+          <a:blip xmlns:r="http://schemas.openxmlformats.org/officeDocument/2006/relationships" xmlns:a="http://schemas.openxmlformats.org/drawingml/2006/main" r:embed="Rc8b495b8487b458f">
             <a:alphaModFix amt="28000"/>
           </a:blip>
           <a:stretch xmlns:a="http://schemas.openxmlformats.org/drawingml/2006/main"/>
@@ -3982,17 +3982,17 @@
   </p:cSld>
   <p:clrMap bg1="lt1" tx1="dk1" bg2="lt2" tx2="dk2" accent1="accent1" accent2="accent2" accent3="accent3" accent4="accent4" accent5="accent5" accent6="accent6" hlink="hlink" folHlink="folHlink"/>
   <p:sldLayoutIdLst>
-    <p:sldLayoutId xmlns:r="http://schemas.openxmlformats.org/officeDocument/2006/relationships" id="2147483649" r:id="Raf7b607ff0074ea5"/>
-    <p:sldLayoutId xmlns:r="http://schemas.openxmlformats.org/officeDocument/2006/relationships" id="2147483650" r:id="Rdeb99e95bd80470b"/>
-    <p:sldLayoutId xmlns:r="http://schemas.openxmlformats.org/officeDocument/2006/relationships" id="2147483651" r:id="R6ac6502593b24933"/>
-    <p:sldLayoutId xmlns:r="http://schemas.openxmlformats.org/officeDocument/2006/relationships" id="2147483652" r:id="R4d0a4a56fd3c40fb"/>
-    <p:sldLayoutId xmlns:r="http://schemas.openxmlformats.org/officeDocument/2006/relationships" id="2147483653" r:id="Rfbee899ac34b4e52"/>
-    <p:sldLayoutId xmlns:r="http://schemas.openxmlformats.org/officeDocument/2006/relationships" id="2147483654" r:id="R8f82c0f5d27244a6"/>
-    <p:sldLayoutId xmlns:r="http://schemas.openxmlformats.org/officeDocument/2006/relationships" id="2147483655" r:id="R69f3afd26a1d4e32"/>
-    <p:sldLayoutId xmlns:r="http://schemas.openxmlformats.org/officeDocument/2006/relationships" id="2147483656" r:id="Rc792beebe183417a"/>
-    <p:sldLayoutId xmlns:r="http://schemas.openxmlformats.org/officeDocument/2006/relationships" id="2147483657" r:id="R4950c6b56d564ffa"/>
-    <p:sldLayoutId xmlns:r="http://schemas.openxmlformats.org/officeDocument/2006/relationships" id="2147483658" r:id="R8dd042f9144249ef"/>
-    <p:sldLayoutId xmlns:r="http://schemas.openxmlformats.org/officeDocument/2006/relationships" id="2147483659" r:id="Rc1825d05d0c9402d"/>
+    <p:sldLayoutId xmlns:r="http://schemas.openxmlformats.org/officeDocument/2006/relationships" id="2147483649" r:id="R758288067c6a419a"/>
+    <p:sldLayoutId xmlns:r="http://schemas.openxmlformats.org/officeDocument/2006/relationships" id="2147483650" r:id="R70e3cf6f7f164520"/>
+    <p:sldLayoutId xmlns:r="http://schemas.openxmlformats.org/officeDocument/2006/relationships" id="2147483651" r:id="Refba92b40b284bbf"/>
+    <p:sldLayoutId xmlns:r="http://schemas.openxmlformats.org/officeDocument/2006/relationships" id="2147483652" r:id="Rfdd40215c90b410f"/>
+    <p:sldLayoutId xmlns:r="http://schemas.openxmlformats.org/officeDocument/2006/relationships" id="2147483653" r:id="R024554b2c72e417c"/>
+    <p:sldLayoutId xmlns:r="http://schemas.openxmlformats.org/officeDocument/2006/relationships" id="2147483654" r:id="Re4e59057ff854c99"/>
+    <p:sldLayoutId xmlns:r="http://schemas.openxmlformats.org/officeDocument/2006/relationships" id="2147483655" r:id="R53d2bb30a9284b03"/>
+    <p:sldLayoutId xmlns:r="http://schemas.openxmlformats.org/officeDocument/2006/relationships" id="2147483656" r:id="R72a218379db244f7"/>
+    <p:sldLayoutId xmlns:r="http://schemas.openxmlformats.org/officeDocument/2006/relationships" id="2147483657" r:id="Rfe5b97e5edf84f78"/>
+    <p:sldLayoutId xmlns:r="http://schemas.openxmlformats.org/officeDocument/2006/relationships" id="2147483658" r:id="Ra260e467a92c4e38"/>
+    <p:sldLayoutId xmlns:r="http://schemas.openxmlformats.org/officeDocument/2006/relationships" id="2147483659" r:id="Ra4798373ef754f90"/>
   </p:sldLayoutIdLst>
   <p:hf hdr="0" ftr="0" dt="0"/>
   <p:txStyles>
@@ -7161,7 +7161,7 @@
                 <a:ea typeface="Calibri"/>
                 <a:cs typeface="Calibri"/>
               </a:rPr>
-              <a:t>Display each drink in upper case as the loop visits it. Keep the final total unchanged. The starter </a:t>
+              <a:t>Create [visited] and store 0 in it before the </a:t>
             </a:r>
             <a:r>
               <a:rPr sz="2400" b="0">
@@ -7172,7 +7172,7 @@
                 <a:ea typeface="JetBrains Mono"/>
                 <a:cs typeface="JetBrains Mono"/>
               </a:rPr>
-              <a:t>list</a:t>
+              <a:t>for</a:t>
             </a:r>
             <a:r>
               <a:rPr sz="2400" b="0">
@@ -7183,7 +7183,117 @@
                 <a:ea typeface="Calibri"/>
                 <a:cs typeface="Calibri"/>
               </a:rPr>
-              <a:t> must display TEA, WATER and JUICE before Total drinks: 3.</a:t>
+              <a:t> loop. Add 1 to [visited] each time the loop displays a drink. After the loop, display </a:t>
+            </a:r>
+            <a:r>
+              <a:rPr sz="2400" b="0">
+                <a:solidFill>
+                  <a:srgbClr val="067D17"/>
+                </a:solidFill>
+                <a:latin typeface="JetBrains Mono"/>
+                <a:ea typeface="JetBrains Mono"/>
+                <a:cs typeface="JetBrains Mono"/>
+              </a:rPr>
+              <a:t>"Visited:"</a:t>
+            </a:r>
+            <a:r>
+              <a:rPr sz="2400" b="0">
+                <a:solidFill>
+                  <a:srgbClr val="080808"/>
+                </a:solidFill>
+                <a:latin typeface="Calibri"/>
+                <a:ea typeface="Calibri"/>
+                <a:cs typeface="Calibri"/>
+              </a:rPr>
+              <a:t> followed by [visited], then keep the existing total from </a:t>
+            </a:r>
+            <a:r>
+              <a:rPr sz="2400" b="0">
+                <a:solidFill>
+                  <a:srgbClr val="1750EB"/>
+                </a:solidFill>
+                <a:latin typeface="JetBrains Mono"/>
+                <a:ea typeface="JetBrains Mono"/>
+                <a:cs typeface="JetBrains Mono"/>
+              </a:rPr>
+              <a:t>len()</a:t>
+            </a:r>
+            <a:r>
+              <a:rPr sz="2400" b="0">
+                <a:solidFill>
+                  <a:srgbClr val="080808"/>
+                </a:solidFill>
+                <a:latin typeface="Calibri"/>
+                <a:ea typeface="Calibri"/>
+                <a:cs typeface="Calibri"/>
+              </a:rPr>
+              <a:t>. For the starter </a:t>
+            </a:r>
+            <a:r>
+              <a:rPr sz="2400" b="0">
+                <a:solidFill>
+                  <a:srgbClr val="1750EB"/>
+                </a:solidFill>
+                <a:latin typeface="JetBrains Mono"/>
+                <a:ea typeface="JetBrains Mono"/>
+                <a:cs typeface="JetBrains Mono"/>
+              </a:rPr>
+              <a:t>list</a:t>
+            </a:r>
+            <a:r>
+              <a:rPr sz="2400" b="0">
+                <a:solidFill>
+                  <a:srgbClr val="080808"/>
+                </a:solidFill>
+                <a:latin typeface="Calibri"/>
+                <a:ea typeface="Calibri"/>
+                <a:cs typeface="Calibri"/>
+              </a:rPr>
+              <a:t>, display </a:t>
+            </a:r>
+            <a:r>
+              <a:rPr sz="2400" b="0">
+                <a:solidFill>
+                  <a:srgbClr val="067D17"/>
+                </a:solidFill>
+                <a:latin typeface="JetBrains Mono"/>
+                <a:ea typeface="JetBrains Mono"/>
+                <a:cs typeface="JetBrains Mono"/>
+              </a:rPr>
+              <a:t>"Visited: 3"</a:t>
+            </a:r>
+            <a:r>
+              <a:rPr sz="2400" b="0">
+                <a:solidFill>
+                  <a:srgbClr val="080808"/>
+                </a:solidFill>
+                <a:latin typeface="Calibri"/>
+                <a:ea typeface="Calibri"/>
+                <a:cs typeface="Calibri"/>
+              </a:rPr>
+              <a:t> and </a:t>
+            </a:r>
+            <a:r>
+              <a:rPr sz="2400" b="0">
+                <a:solidFill>
+                  <a:srgbClr val="067D17"/>
+                </a:solidFill>
+                <a:latin typeface="JetBrains Mono"/>
+                <a:ea typeface="JetBrains Mono"/>
+                <a:cs typeface="JetBrains Mono"/>
+              </a:rPr>
+              <a:t>"Total drinks: 3"</a:t>
+            </a:r>
+            <a:r>
+              <a:rPr sz="2400" b="0">
+                <a:solidFill>
+                  <a:srgbClr val="080808"/>
+                </a:solidFill>
+                <a:latin typeface="Calibri"/>
+                <a:ea typeface="Calibri"/>
+                <a:cs typeface="Calibri"/>
+              </a:rPr>
+              <a:t>.</a:t>
             </a:r>
           </a:p>
         </p:txBody>
@@ -7830,18 +7940,18 @@
                 <a:ea typeface="Calibri"/>
                 <a:cs typeface="Calibri"/>
               </a:rPr>
-              <a:t>Add a fourth survey answer to the </a:t>
+              <a:t>Add </a:t>
             </a:r>
             <a:r>
               <a:rPr sz="2400" b="0">
                 <a:solidFill>
-                  <a:srgbClr val="1750EB"/>
-                </a:solidFill>
-                <a:latin typeface="JetBrains Mono"/>
-                <a:ea typeface="JetBrains Mono"/>
-                <a:cs typeface="JetBrains Mono"/>
-              </a:rPr>
-              <a:t>list</a:t>
+                  <a:srgbClr val="067D17"/>
+                </a:solidFill>
+                <a:latin typeface="JetBrains Mono"/>
+                <a:ea typeface="JetBrains Mono"/>
+                <a:cs typeface="JetBrains Mono"/>
+              </a:rPr>
+              <a:t>"coffee"</a:t>
             </a:r>
             <a:r>
               <a:rPr sz="2400" b="0">
@@ -7852,7 +7962,95 @@
                 <a:ea typeface="Calibri"/>
                 <a:cs typeface="Calibri"/>
               </a:rPr>
-              <a:t>. Before running, predict the last answer and the total that will appear; then check both.</a:t>
+              <a:t> as the fourth item in [survey]. Keep the </a:t>
+            </a:r>
+            <a:r>
+              <a:rPr sz="2400" b="0">
+                <a:solidFill>
+                  <a:srgbClr val="1750EB"/>
+                </a:solidFill>
+                <a:latin typeface="JetBrains Mono"/>
+                <a:ea typeface="JetBrains Mono"/>
+                <a:cs typeface="JetBrains Mono"/>
+              </a:rPr>
+              <a:t>for</a:t>
+            </a:r>
+            <a:r>
+              <a:rPr sz="2400" b="0">
+                <a:solidFill>
+                  <a:srgbClr val="080808"/>
+                </a:solidFill>
+                <a:latin typeface="Calibri"/>
+                <a:ea typeface="Calibri"/>
+                <a:cs typeface="Calibri"/>
+              </a:rPr>
+              <a:t> loop so every item is displayed, then display the new result from </a:t>
+            </a:r>
+            <a:r>
+              <a:rPr sz="2400" b="0">
+                <a:solidFill>
+                  <a:srgbClr val="1750EB"/>
+                </a:solidFill>
+                <a:latin typeface="JetBrains Mono"/>
+                <a:ea typeface="JetBrains Mono"/>
+                <a:cs typeface="JetBrains Mono"/>
+              </a:rPr>
+              <a:t>len()</a:t>
+            </a:r>
+            <a:r>
+              <a:rPr sz="2400" b="0">
+                <a:solidFill>
+                  <a:srgbClr val="080808"/>
+                </a:solidFill>
+                <a:latin typeface="Calibri"/>
+                <a:ea typeface="Calibri"/>
+                <a:cs typeface="Calibri"/>
+              </a:rPr>
+              <a:t>. The last item line must be </a:t>
+            </a:r>
+            <a:r>
+              <a:rPr sz="2400" b="0">
+                <a:solidFill>
+                  <a:srgbClr val="067D17"/>
+                </a:solidFill>
+                <a:latin typeface="JetBrains Mono"/>
+                <a:ea typeface="JetBrains Mono"/>
+                <a:cs typeface="JetBrains Mono"/>
+              </a:rPr>
+              <a:t>"Drink: coffee"</a:t>
+            </a:r>
+            <a:r>
+              <a:rPr sz="2400" b="0">
+                <a:solidFill>
+                  <a:srgbClr val="080808"/>
+                </a:solidFill>
+                <a:latin typeface="Calibri"/>
+                <a:ea typeface="Calibri"/>
+                <a:cs typeface="Calibri"/>
+              </a:rPr>
+              <a:t> and the final line must be </a:t>
+            </a:r>
+            <a:r>
+              <a:rPr sz="2400" b="0">
+                <a:solidFill>
+                  <a:srgbClr val="067D17"/>
+                </a:solidFill>
+                <a:latin typeface="JetBrains Mono"/>
+                <a:ea typeface="JetBrains Mono"/>
+                <a:cs typeface="JetBrains Mono"/>
+              </a:rPr>
+              <a:t>"Total drinks: 4"</a:t>
+            </a:r>
+            <a:r>
+              <a:rPr sz="2400" b="0">
+                <a:solidFill>
+                  <a:srgbClr val="080808"/>
+                </a:solidFill>
+                <a:latin typeface="Calibri"/>
+                <a:ea typeface="Calibri"/>
+                <a:cs typeface="Calibri"/>
+              </a:rPr>
+              <a:t>.</a:t>
             </a:r>
           </a:p>
         </p:txBody>
@@ -8499,18 +8697,18 @@
                 <a:ea typeface="Calibri"/>
                 <a:cs typeface="Calibri"/>
               </a:rPr>
-              <a:t>Create a colour-survey summary with three answers of your choice. Use a </a:t>
+              <a:t>Store </a:t>
             </a:r>
             <a:r>
               <a:rPr sz="2400" b="0">
                 <a:solidFill>
-                  <a:srgbClr val="1750EB"/>
-                </a:solidFill>
-                <a:latin typeface="JetBrains Mono"/>
-                <a:ea typeface="JetBrains Mono"/>
-                <a:cs typeface="JetBrains Mono"/>
-              </a:rPr>
-              <a:t>for</a:t>
+                  <a:srgbClr val="067D17"/>
+                </a:solidFill>
+                <a:latin typeface="JetBrains Mono"/>
+                <a:ea typeface="JetBrains Mono"/>
+                <a:cs typeface="JetBrains Mono"/>
+              </a:rPr>
+              <a:t>"blue"</a:t>
             </a:r>
             <a:r>
               <a:rPr sz="2400" b="0">
@@ -8521,18 +8719,18 @@
                 <a:ea typeface="Calibri"/>
                 <a:cs typeface="Calibri"/>
               </a:rPr>
-              <a:t> loop to label every colour, then use </a:t>
+              <a:t>, </a:t>
             </a:r>
             <a:r>
               <a:rPr sz="2400" b="0">
                 <a:solidFill>
-                  <a:srgbClr val="1750EB"/>
-                </a:solidFill>
-                <a:latin typeface="JetBrains Mono"/>
-                <a:ea typeface="JetBrains Mono"/>
-                <a:cs typeface="JetBrains Mono"/>
-              </a:rPr>
-              <a:t>len()</a:t>
+                  <a:srgbClr val="067D17"/>
+                </a:solidFill>
+                <a:latin typeface="JetBrains Mono"/>
+                <a:ea typeface="JetBrains Mono"/>
+                <a:cs typeface="JetBrains Mono"/>
+              </a:rPr>
+              <a:t>"green"</a:t>
             </a:r>
             <a:r>
               <a:rPr sz="2400" b="0">
@@ -8543,7 +8741,139 @@
                 <a:ea typeface="Calibri"/>
                 <a:cs typeface="Calibri"/>
               </a:rPr>
-              <a:t> once to report how many answers were collected.</a:t>
+              <a:t> and </a:t>
+            </a:r>
+            <a:r>
+              <a:rPr sz="2400" b="0">
+                <a:solidFill>
+                  <a:srgbClr val="067D17"/>
+                </a:solidFill>
+                <a:latin typeface="JetBrains Mono"/>
+                <a:ea typeface="JetBrains Mono"/>
+                <a:cs typeface="JetBrains Mono"/>
+              </a:rPr>
+              <a:t>"red"</a:t>
+            </a:r>
+            <a:r>
+              <a:rPr sz="2400" b="0">
+                <a:solidFill>
+                  <a:srgbClr val="080808"/>
+                </a:solidFill>
+                <a:latin typeface="Calibri"/>
+                <a:ea typeface="Calibri"/>
+                <a:cs typeface="Calibri"/>
+              </a:rPr>
+              <a:t> in [colours]. Use a </a:t>
+            </a:r>
+            <a:r>
+              <a:rPr sz="2400" b="0">
+                <a:solidFill>
+                  <a:srgbClr val="1750EB"/>
+                </a:solidFill>
+                <a:latin typeface="JetBrains Mono"/>
+                <a:ea typeface="JetBrains Mono"/>
+                <a:cs typeface="JetBrains Mono"/>
+              </a:rPr>
+              <a:t>for</a:t>
+            </a:r>
+            <a:r>
+              <a:rPr sz="2400" b="0">
+                <a:solidFill>
+                  <a:srgbClr val="080808"/>
+                </a:solidFill>
+                <a:latin typeface="Calibri"/>
+                <a:ea typeface="Calibri"/>
+                <a:cs typeface="Calibri"/>
+              </a:rPr>
+              <a:t> loop and [colour] to display each value after the label </a:t>
+            </a:r>
+            <a:r>
+              <a:rPr sz="2400" b="0">
+                <a:solidFill>
+                  <a:srgbClr val="067D17"/>
+                </a:solidFill>
+                <a:latin typeface="JetBrains Mono"/>
+                <a:ea typeface="JetBrains Mono"/>
+                <a:cs typeface="JetBrains Mono"/>
+              </a:rPr>
+              <a:t>"Colour:"</a:t>
+            </a:r>
+            <a:r>
+              <a:rPr sz="2400" b="0">
+                <a:solidFill>
+                  <a:srgbClr val="080808"/>
+                </a:solidFill>
+                <a:latin typeface="Calibri"/>
+                <a:ea typeface="Calibri"/>
+                <a:cs typeface="Calibri"/>
+              </a:rPr>
+              <a:t>. After the loop, display </a:t>
+            </a:r>
+            <a:r>
+              <a:rPr sz="2400" b="0">
+                <a:solidFill>
+                  <a:srgbClr val="067D17"/>
+                </a:solidFill>
+                <a:latin typeface="JetBrains Mono"/>
+                <a:ea typeface="JetBrains Mono"/>
+                <a:cs typeface="JetBrains Mono"/>
+              </a:rPr>
+              <a:t>"Number of answers:"</a:t>
+            </a:r>
+            <a:r>
+              <a:rPr sz="2400" b="0">
+                <a:solidFill>
+                  <a:srgbClr val="080808"/>
+                </a:solidFill>
+                <a:latin typeface="Calibri"/>
+                <a:ea typeface="Calibri"/>
+                <a:cs typeface="Calibri"/>
+              </a:rPr>
+              <a:t> followed by </a:t>
+            </a:r>
+            <a:r>
+              <a:rPr sz="2400" b="0">
+                <a:solidFill>
+                  <a:srgbClr val="1750EB"/>
+                </a:solidFill>
+                <a:latin typeface="JetBrains Mono"/>
+                <a:ea typeface="JetBrains Mono"/>
+                <a:cs typeface="JetBrains Mono"/>
+              </a:rPr>
+              <a:t>len</a:t>
+            </a:r>
+            <a:r>
+              <a:rPr sz="2400" b="0">
+                <a:solidFill>
+                  <a:srgbClr val="080808"/>
+                </a:solidFill>
+                <a:latin typeface="Calibri"/>
+                <a:ea typeface="Calibri"/>
+                <a:cs typeface="Calibri"/>
+              </a:rPr>
+              <a:t>(colours). The final line must be </a:t>
+            </a:r>
+            <a:r>
+              <a:rPr sz="2400" b="0">
+                <a:solidFill>
+                  <a:srgbClr val="067D17"/>
+                </a:solidFill>
+                <a:latin typeface="JetBrains Mono"/>
+                <a:ea typeface="JetBrains Mono"/>
+                <a:cs typeface="JetBrains Mono"/>
+              </a:rPr>
+              <a:t>"Number of answers: 3"</a:t>
+            </a:r>
+            <a:r>
+              <a:rPr sz="2400" b="0">
+                <a:solidFill>
+                  <a:srgbClr val="080808"/>
+                </a:solidFill>
+                <a:latin typeface="Calibri"/>
+                <a:ea typeface="Calibri"/>
+                <a:cs typeface="Calibri"/>
+              </a:rPr>
+              <a:t>.</a:t>
             </a:r>
           </a:p>
         </p:txBody>

--- a/Mapped Curriculum Lessons/Grade 7/Lesson 25 - Working Through Lists/Working Through Lists - Slides.pptx
+++ b/Mapped Curriculum Lessons/Grade 7/Lesson 25 - Working Through Lists/Working Through Lists - Slides.pptx
@@ -2,28 +2,28 @@
 <file path=ppt/presentation.xml><?xml version="1.0" encoding="utf-8"?>
 <p:presentation xmlns:p="http://schemas.openxmlformats.org/presentationml/2006/main" embedTrueTypeFonts="1" saveSubsetFonts="0">
   <p:sldMasterIdLst>
-    <p:sldMasterId xmlns:r="http://schemas.openxmlformats.org/officeDocument/2006/relationships" id="2147483648" r:id="R620a337c67ea406e"/>
+    <p:sldMasterId xmlns:r="http://schemas.openxmlformats.org/officeDocument/2006/relationships" id="2147483648" r:id="R5a1a9a064a734005"/>
   </p:sldMasterIdLst>
   <p:notesMasterIdLst>
-    <p:notesMasterId xmlns:r="http://schemas.openxmlformats.org/officeDocument/2006/relationships" r:id="R8be4fecff4f04174"/>
+    <p:notesMasterId xmlns:r="http://schemas.openxmlformats.org/officeDocument/2006/relationships" r:id="R77318918b8ca4239"/>
   </p:notesMasterIdLst>
   <p:sldIdLst>
-    <p:sldId xmlns:r="http://schemas.openxmlformats.org/officeDocument/2006/relationships" id="256" r:id="R6ffd504317234103"/>
-    <p:sldId xmlns:r="http://schemas.openxmlformats.org/officeDocument/2006/relationships" id="257" r:id="Rf2c752e5422f477b"/>
-    <p:sldId xmlns:r="http://schemas.openxmlformats.org/officeDocument/2006/relationships" id="258" r:id="Rf5cf5241351f4367"/>
-    <p:sldId xmlns:r="http://schemas.openxmlformats.org/officeDocument/2006/relationships" id="259" r:id="R0419367dc92e463f"/>
-    <p:sldId xmlns:r="http://schemas.openxmlformats.org/officeDocument/2006/relationships" id="260" r:id="Rf6b6d3c2d9b441b9"/>
-    <p:sldId xmlns:r="http://schemas.openxmlformats.org/officeDocument/2006/relationships" id="261" r:id="Rd365361f5b42477f"/>
-    <p:sldId xmlns:r="http://schemas.openxmlformats.org/officeDocument/2006/relationships" id="262" r:id="R30846a31c40840aa"/>
-    <p:sldId xmlns:r="http://schemas.openxmlformats.org/officeDocument/2006/relationships" id="263" r:id="R427c3fbf528049a0"/>
-    <p:sldId xmlns:r="http://schemas.openxmlformats.org/officeDocument/2006/relationships" id="264" r:id="R0d144c8a9a904f04"/>
+    <p:sldId xmlns:r="http://schemas.openxmlformats.org/officeDocument/2006/relationships" id="256" r:id="R91306fd0d52d49c6"/>
+    <p:sldId xmlns:r="http://schemas.openxmlformats.org/officeDocument/2006/relationships" id="257" r:id="Rfd84fca170bf4a4e"/>
+    <p:sldId xmlns:r="http://schemas.openxmlformats.org/officeDocument/2006/relationships" id="258" r:id="R2cdddbde60314141"/>
+    <p:sldId xmlns:r="http://schemas.openxmlformats.org/officeDocument/2006/relationships" id="259" r:id="R1ca9ad390aef4daf"/>
+    <p:sldId xmlns:r="http://schemas.openxmlformats.org/officeDocument/2006/relationships" id="260" r:id="Rf57313170f064e6f"/>
+    <p:sldId xmlns:r="http://schemas.openxmlformats.org/officeDocument/2006/relationships" id="261" r:id="Rc2d3414da64042f8"/>
+    <p:sldId xmlns:r="http://schemas.openxmlformats.org/officeDocument/2006/relationships" id="262" r:id="R562daefee2a6490a"/>
+    <p:sldId xmlns:r="http://schemas.openxmlformats.org/officeDocument/2006/relationships" id="263" r:id="R5914054483184d15"/>
+    <p:sldId xmlns:r="http://schemas.openxmlformats.org/officeDocument/2006/relationships" id="264" r:id="R5461bd7af238486f"/>
   </p:sldIdLst>
   <p:sldSz cx="12192000" cy="6858000"/>
   <p:notesSz cx="6858000" cy="9144000"/>
   <p:embeddedFontLst>
     <p:embeddedFont>
       <p:font typeface="JetBrains Mono"/>
-      <p:regular xmlns:r="http://schemas.openxmlformats.org/officeDocument/2006/relationships" r:id="Reb345a93419c4bad"/>
+      <p:regular xmlns:r="http://schemas.openxmlformats.org/officeDocument/2006/relationships" r:id="R9991d307070e414e"/>
     </p:embeddedFont>
   </p:embeddedFontLst>
 </p:presentation>
@@ -1071,7 +1071,7 @@
           <p:nvPr/>
         </p:nvPicPr>
         <p:blipFill rotWithShape="1">
-          <a:blip xmlns:r="http://schemas.openxmlformats.org/officeDocument/2006/relationships" xmlns:a="http://schemas.openxmlformats.org/drawingml/2006/main" r:embed="Rc0b9f001afc04b83"/>
+          <a:blip xmlns:r="http://schemas.openxmlformats.org/officeDocument/2006/relationships" xmlns:a="http://schemas.openxmlformats.org/drawingml/2006/main" r:embed="R6d60ca44a2a64f9f"/>
           <a:stretch xmlns:a="http://schemas.openxmlformats.org/drawingml/2006/main"/>
         </p:blipFill>
         <p:spPr>
@@ -1451,7 +1451,7 @@
           <p:nvPr/>
         </p:nvPicPr>
         <p:blipFill rotWithShape="1">
-          <a:blip xmlns:r="http://schemas.openxmlformats.org/officeDocument/2006/relationships" xmlns:a="http://schemas.openxmlformats.org/drawingml/2006/main" r:embed="R390674b6ce9a4d64">
+          <a:blip xmlns:r="http://schemas.openxmlformats.org/officeDocument/2006/relationships" xmlns:a="http://schemas.openxmlformats.org/drawingml/2006/main" r:embed="Rbfecf872316c42b6">
             <a:alphaModFix amt="28000"/>
           </a:blip>
           <a:stretch xmlns:a="http://schemas.openxmlformats.org/drawingml/2006/main"/>
@@ -1664,7 +1664,7 @@
           <p:nvPr/>
         </p:nvPicPr>
         <p:blipFill rotWithShape="1">
-          <a:blip xmlns:r="http://schemas.openxmlformats.org/officeDocument/2006/relationships" xmlns:a="http://schemas.openxmlformats.org/drawingml/2006/main" r:embed="R2752388e3b884f43">
+          <a:blip xmlns:r="http://schemas.openxmlformats.org/officeDocument/2006/relationships" xmlns:a="http://schemas.openxmlformats.org/drawingml/2006/main" r:embed="R729df5ee8b0c4844">
             <a:alphaModFix amt="28000"/>
           </a:blip>
           <a:stretch xmlns:a="http://schemas.openxmlformats.org/drawingml/2006/main"/>
@@ -1899,7 +1899,7 @@
           <p:nvPr/>
         </p:nvPicPr>
         <p:blipFill rotWithShape="1">
-          <a:blip xmlns:r="http://schemas.openxmlformats.org/officeDocument/2006/relationships" xmlns:a="http://schemas.openxmlformats.org/drawingml/2006/main" r:embed="R79f879e4c73f48db">
+          <a:blip xmlns:r="http://schemas.openxmlformats.org/officeDocument/2006/relationships" xmlns:a="http://schemas.openxmlformats.org/drawingml/2006/main" r:embed="R6a61778eaae24d60">
             <a:alphaModFix amt="28000"/>
           </a:blip>
           <a:stretch xmlns:a="http://schemas.openxmlformats.org/drawingml/2006/main"/>
@@ -2176,7 +2176,7 @@
           <p:nvPr/>
         </p:nvPicPr>
         <p:blipFill rotWithShape="1">
-          <a:blip xmlns:r="http://schemas.openxmlformats.org/officeDocument/2006/relationships" xmlns:a="http://schemas.openxmlformats.org/drawingml/2006/main" r:embed="Rea8e0dcabb004173">
+          <a:blip xmlns:r="http://schemas.openxmlformats.org/officeDocument/2006/relationships" xmlns:a="http://schemas.openxmlformats.org/drawingml/2006/main" r:embed="R5712b5385152451f">
             <a:alphaModFix amt="28000"/>
           </a:blip>
           <a:stretch xmlns:a="http://schemas.openxmlformats.org/drawingml/2006/main"/>
@@ -2451,7 +2451,7 @@
           <p:nvPr/>
         </p:nvPicPr>
         <p:blipFill rotWithShape="1">
-          <a:blip xmlns:r="http://schemas.openxmlformats.org/officeDocument/2006/relationships" xmlns:a="http://schemas.openxmlformats.org/drawingml/2006/main" r:embed="R256acdc9de3b4a9d">
+          <a:blip xmlns:r="http://schemas.openxmlformats.org/officeDocument/2006/relationships" xmlns:a="http://schemas.openxmlformats.org/drawingml/2006/main" r:embed="R3aabd76c105b4757">
             <a:alphaModFix amt="28000"/>
           </a:blip>
           <a:stretch xmlns:a="http://schemas.openxmlformats.org/drawingml/2006/main"/>
@@ -2875,7 +2875,7 @@
           <p:nvPr/>
         </p:nvPicPr>
         <p:blipFill rotWithShape="1">
-          <a:blip xmlns:r="http://schemas.openxmlformats.org/officeDocument/2006/relationships" xmlns:a="http://schemas.openxmlformats.org/drawingml/2006/main" r:embed="R0513a43fdcbe4c0f">
+          <a:blip xmlns:r="http://schemas.openxmlformats.org/officeDocument/2006/relationships" xmlns:a="http://schemas.openxmlformats.org/drawingml/2006/main" r:embed="R5c15d3aa805c4926">
             <a:alphaModFix amt="28000"/>
           </a:blip>
           <a:stretch xmlns:a="http://schemas.openxmlformats.org/drawingml/2006/main"/>
@@ -3016,7 +3016,7 @@
           <p:nvPr/>
         </p:nvPicPr>
         <p:blipFill rotWithShape="1">
-          <a:blip xmlns:r="http://schemas.openxmlformats.org/officeDocument/2006/relationships" xmlns:a="http://schemas.openxmlformats.org/drawingml/2006/main" r:embed="R290789f427dd4b26">
+          <a:blip xmlns:r="http://schemas.openxmlformats.org/officeDocument/2006/relationships" xmlns:a="http://schemas.openxmlformats.org/drawingml/2006/main" r:embed="R170129a068e8437f">
             <a:alphaModFix amt="28000"/>
           </a:blip>
           <a:stretch xmlns:a="http://schemas.openxmlformats.org/drawingml/2006/main"/>
@@ -3130,7 +3130,7 @@
           <p:nvPr/>
         </p:nvPicPr>
         <p:blipFill rotWithShape="1">
-          <a:blip xmlns:r="http://schemas.openxmlformats.org/officeDocument/2006/relationships" xmlns:a="http://schemas.openxmlformats.org/drawingml/2006/main" r:embed="R69f73051a40041b6">
+          <a:blip xmlns:r="http://schemas.openxmlformats.org/officeDocument/2006/relationships" xmlns:a="http://schemas.openxmlformats.org/drawingml/2006/main" r:embed="Rab0ffd827e034a2a">
             <a:alphaModFix amt="28000"/>
           </a:blip>
           <a:stretch xmlns:a="http://schemas.openxmlformats.org/drawingml/2006/main"/>
@@ -3457,7 +3457,7 @@
           <p:nvPr/>
         </p:nvPicPr>
         <p:blipFill rotWithShape="1">
-          <a:blip xmlns:r="http://schemas.openxmlformats.org/officeDocument/2006/relationships" xmlns:a="http://schemas.openxmlformats.org/drawingml/2006/main" r:embed="R9ff99e7427024cb4">
+          <a:blip xmlns:r="http://schemas.openxmlformats.org/officeDocument/2006/relationships" xmlns:a="http://schemas.openxmlformats.org/drawingml/2006/main" r:embed="R1cb70bf0d4834dcb">
             <a:alphaModFix amt="28000"/>
           </a:blip>
           <a:stretch xmlns:a="http://schemas.openxmlformats.org/drawingml/2006/main"/>
@@ -3745,7 +3745,7 @@
           <p:nvPr/>
         </p:nvPicPr>
         <p:blipFill rotWithShape="1">
-          <a:blip xmlns:r="http://schemas.openxmlformats.org/officeDocument/2006/relationships" xmlns:a="http://schemas.openxmlformats.org/drawingml/2006/main" r:embed="Rc8b495b8487b458f">
+          <a:blip xmlns:r="http://schemas.openxmlformats.org/officeDocument/2006/relationships" xmlns:a="http://schemas.openxmlformats.org/drawingml/2006/main" r:embed="R3f31c1ee6f8a4045">
             <a:alphaModFix amt="28000"/>
           </a:blip>
           <a:stretch xmlns:a="http://schemas.openxmlformats.org/drawingml/2006/main"/>
@@ -3982,17 +3982,17 @@
   </p:cSld>
   <p:clrMap bg1="lt1" tx1="dk1" bg2="lt2" tx2="dk2" accent1="accent1" accent2="accent2" accent3="accent3" accent4="accent4" accent5="accent5" accent6="accent6" hlink="hlink" folHlink="folHlink"/>
   <p:sldLayoutIdLst>
-    <p:sldLayoutId xmlns:r="http://schemas.openxmlformats.org/officeDocument/2006/relationships" id="2147483649" r:id="R758288067c6a419a"/>
-    <p:sldLayoutId xmlns:r="http://schemas.openxmlformats.org/officeDocument/2006/relationships" id="2147483650" r:id="R70e3cf6f7f164520"/>
-    <p:sldLayoutId xmlns:r="http://schemas.openxmlformats.org/officeDocument/2006/relationships" id="2147483651" r:id="Refba92b40b284bbf"/>
-    <p:sldLayoutId xmlns:r="http://schemas.openxmlformats.org/officeDocument/2006/relationships" id="2147483652" r:id="Rfdd40215c90b410f"/>
-    <p:sldLayoutId xmlns:r="http://schemas.openxmlformats.org/officeDocument/2006/relationships" id="2147483653" r:id="R024554b2c72e417c"/>
-    <p:sldLayoutId xmlns:r="http://schemas.openxmlformats.org/officeDocument/2006/relationships" id="2147483654" r:id="Re4e59057ff854c99"/>
-    <p:sldLayoutId xmlns:r="http://schemas.openxmlformats.org/officeDocument/2006/relationships" id="2147483655" r:id="R53d2bb30a9284b03"/>
-    <p:sldLayoutId xmlns:r="http://schemas.openxmlformats.org/officeDocument/2006/relationships" id="2147483656" r:id="R72a218379db244f7"/>
-    <p:sldLayoutId xmlns:r="http://schemas.openxmlformats.org/officeDocument/2006/relationships" id="2147483657" r:id="Rfe5b97e5edf84f78"/>
-    <p:sldLayoutId xmlns:r="http://schemas.openxmlformats.org/officeDocument/2006/relationships" id="2147483658" r:id="Ra260e467a92c4e38"/>
-    <p:sldLayoutId xmlns:r="http://schemas.openxmlformats.org/officeDocument/2006/relationships" id="2147483659" r:id="Ra4798373ef754f90"/>
+    <p:sldLayoutId xmlns:r="http://schemas.openxmlformats.org/officeDocument/2006/relationships" id="2147483649" r:id="Rc080d0ea1eeb435d"/>
+    <p:sldLayoutId xmlns:r="http://schemas.openxmlformats.org/officeDocument/2006/relationships" id="2147483650" r:id="Rb9d9c2d32da04d26"/>
+    <p:sldLayoutId xmlns:r="http://schemas.openxmlformats.org/officeDocument/2006/relationships" id="2147483651" r:id="Raf2cedb885eb4b2d"/>
+    <p:sldLayoutId xmlns:r="http://schemas.openxmlformats.org/officeDocument/2006/relationships" id="2147483652" r:id="Ra0ed351810db463b"/>
+    <p:sldLayoutId xmlns:r="http://schemas.openxmlformats.org/officeDocument/2006/relationships" id="2147483653" r:id="R3c9ac6bf3ad34599"/>
+    <p:sldLayoutId xmlns:r="http://schemas.openxmlformats.org/officeDocument/2006/relationships" id="2147483654" r:id="R1efb9ede0b114866"/>
+    <p:sldLayoutId xmlns:r="http://schemas.openxmlformats.org/officeDocument/2006/relationships" id="2147483655" r:id="Rd601cf0834034f0f"/>
+    <p:sldLayoutId xmlns:r="http://schemas.openxmlformats.org/officeDocument/2006/relationships" id="2147483656" r:id="Re39e1d0682784600"/>
+    <p:sldLayoutId xmlns:r="http://schemas.openxmlformats.org/officeDocument/2006/relationships" id="2147483657" r:id="Rbe3f41283b4c4cd8"/>
+    <p:sldLayoutId xmlns:r="http://schemas.openxmlformats.org/officeDocument/2006/relationships" id="2147483658" r:id="Rc94d1a49ad294a54"/>
+    <p:sldLayoutId xmlns:r="http://schemas.openxmlformats.org/officeDocument/2006/relationships" id="2147483659" r:id="Raac6215fbb1b4baf"/>
   </p:sldLayoutIdLst>
   <p:hf hdr="0" ftr="0" dt="0"/>
   <p:txStyles>
@@ -7161,18 +7161,21 @@
                 <a:ea typeface="Calibri"/>
                 <a:cs typeface="Calibri"/>
               </a:rPr>
-              <a:t>Create [visited] and store 0 in it before the </a:t>
-            </a:r>
-            <a:r>
-              <a:rPr sz="2400" b="0">
-                <a:solidFill>
-                  <a:srgbClr val="1750EB"/>
-                </a:solidFill>
-                <a:latin typeface="JetBrains Mono"/>
-                <a:ea typeface="JetBrains Mono"/>
-                <a:cs typeface="JetBrains Mono"/>
-              </a:rPr>
-              <a:t>for</a:t>
+              <a:t>Change the example so it counts the drinks as the loop runs. Store 0 in </a:t>
+            </a:r>
+            <a:r>
+              <a:rPr sz="2050" b="0">
+                <a:solidFill>
+                  <a:srgbClr val="6A1B9A"/>
+                </a:solidFill>
+                <a:highlight>
+                  <a:srgbClr val="ECEAF4"/>
+                </a:highlight>
+                <a:latin typeface="JetBrains Mono"/>
+                <a:ea typeface="JetBrains Mono"/>
+                <a:cs typeface="JetBrains Mono"/>
+              </a:rPr>
+              <a:t> visited </a:t>
             </a:r>
             <a:r>
               <a:rPr sz="2400" b="0">
@@ -7183,18 +7186,18 @@
                 <a:ea typeface="Calibri"/>
                 <a:cs typeface="Calibri"/>
               </a:rPr>
-              <a:t> loop. Add 1 to [visited] each time the loop displays a drink. After the loop, display </a:t>
-            </a:r>
-            <a:r>
-              <a:rPr sz="2400" b="0">
-                <a:solidFill>
-                  <a:srgbClr val="067D17"/>
-                </a:solidFill>
-                <a:latin typeface="JetBrains Mono"/>
-                <a:ea typeface="JetBrains Mono"/>
-                <a:cs typeface="JetBrains Mono"/>
-              </a:rPr>
-              <a:t>"Visited:"</a:t>
+              <a:t> before the </a:t>
+            </a:r>
+            <a:r>
+              <a:rPr sz="2050" b="0">
+                <a:solidFill>
+                  <a:srgbClr val="1750EB"/>
+                </a:solidFill>
+                <a:latin typeface="JetBrains Mono"/>
+                <a:ea typeface="JetBrains Mono"/>
+                <a:cs typeface="JetBrains Mono"/>
+              </a:rPr>
+              <a:t>for</a:t>
             </a:r>
             <a:r>
               <a:rPr sz="2400" b="0">
@@ -7205,18 +7208,18 @@
                 <a:ea typeface="Calibri"/>
                 <a:cs typeface="Calibri"/>
               </a:rPr>
-              <a:t> followed by [visited], then keep the existing total from </a:t>
-            </a:r>
-            <a:r>
-              <a:rPr sz="2400" b="0">
-                <a:solidFill>
-                  <a:srgbClr val="1750EB"/>
-                </a:solidFill>
-                <a:latin typeface="JetBrains Mono"/>
-                <a:ea typeface="JetBrains Mono"/>
-                <a:cs typeface="JetBrains Mono"/>
-              </a:rPr>
-              <a:t>len()</a:t>
+              <a:t> loop and add 1 inside it. After the loop, display </a:t>
+            </a:r>
+            <a:r>
+              <a:rPr sz="2050" b="0">
+                <a:solidFill>
+                  <a:srgbClr val="067D17"/>
+                </a:solidFill>
+                <a:latin typeface="JetBrains Mono"/>
+                <a:ea typeface="JetBrains Mono"/>
+                <a:cs typeface="JetBrains Mono"/>
+              </a:rPr>
+              <a:t>"Visited:"</a:t>
             </a:r>
             <a:r>
               <a:rPr sz="2400" b="0">
@@ -7227,18 +7230,21 @@
                 <a:ea typeface="Calibri"/>
                 <a:cs typeface="Calibri"/>
               </a:rPr>
-              <a:t>. For the starter </a:t>
-            </a:r>
-            <a:r>
-              <a:rPr sz="2400" b="0">
-                <a:solidFill>
-                  <a:srgbClr val="1750EB"/>
-                </a:solidFill>
-                <a:latin typeface="JetBrains Mono"/>
-                <a:ea typeface="JetBrains Mono"/>
-                <a:cs typeface="JetBrains Mono"/>
-              </a:rPr>
-              <a:t>list</a:t>
+              <a:t> followed by </a:t>
+            </a:r>
+            <a:r>
+              <a:rPr sz="2050" b="0">
+                <a:solidFill>
+                  <a:srgbClr val="6A1B9A"/>
+                </a:solidFill>
+                <a:highlight>
+                  <a:srgbClr val="ECEAF4"/>
+                </a:highlight>
+                <a:latin typeface="JetBrains Mono"/>
+                <a:ea typeface="JetBrains Mono"/>
+                <a:cs typeface="JetBrains Mono"/>
+              </a:rPr>
+              <a:t> visited </a:t>
             </a:r>
             <a:r>
               <a:rPr sz="2400" b="0">
@@ -7249,18 +7255,18 @@
                 <a:ea typeface="Calibri"/>
                 <a:cs typeface="Calibri"/>
               </a:rPr>
-              <a:t>, display </a:t>
-            </a:r>
-            <a:r>
-              <a:rPr sz="2400" b="0">
-                <a:solidFill>
-                  <a:srgbClr val="067D17"/>
-                </a:solidFill>
-                <a:latin typeface="JetBrains Mono"/>
-                <a:ea typeface="JetBrains Mono"/>
-                <a:cs typeface="JetBrains Mono"/>
-              </a:rPr>
-              <a:t>"Visited: 3"</a:t>
+              <a:t>, then the existing </a:t>
+            </a:r>
+            <a:r>
+              <a:rPr sz="2050" b="0">
+                <a:solidFill>
+                  <a:srgbClr val="1750EB"/>
+                </a:solidFill>
+                <a:latin typeface="JetBrains Mono"/>
+                <a:ea typeface="JetBrains Mono"/>
+                <a:cs typeface="JetBrains Mono"/>
+              </a:rPr>
+              <a:t>len()</a:t>
             </a:r>
             <a:r>
               <a:rPr sz="2400" b="0">
@@ -7271,29 +7277,7 @@
                 <a:ea typeface="Calibri"/>
                 <a:cs typeface="Calibri"/>
               </a:rPr>
-              <a:t> and </a:t>
-            </a:r>
-            <a:r>
-              <a:rPr sz="2400" b="0">
-                <a:solidFill>
-                  <a:srgbClr val="067D17"/>
-                </a:solidFill>
-                <a:latin typeface="JetBrains Mono"/>
-                <a:ea typeface="JetBrains Mono"/>
-                <a:cs typeface="JetBrains Mono"/>
-              </a:rPr>
-              <a:t>"Total drinks: 3"</a:t>
-            </a:r>
-            <a:r>
-              <a:rPr sz="2400" b="0">
-                <a:solidFill>
-                  <a:srgbClr val="080808"/>
-                </a:solidFill>
-                <a:latin typeface="Calibri"/>
-                <a:ea typeface="Calibri"/>
-                <a:cs typeface="Calibri"/>
-              </a:rPr>
-              <a:t>.</a:t>
+              <a:t> total. Both lines should show 3.</a:t>
             </a:r>
           </a:p>
         </p:txBody>
@@ -7940,18 +7924,21 @@
                 <a:ea typeface="Calibri"/>
                 <a:cs typeface="Calibri"/>
               </a:rPr>
-              <a:t>Add </a:t>
-            </a:r>
-            <a:r>
-              <a:rPr sz="2400" b="0">
-                <a:solidFill>
-                  <a:srgbClr val="067D17"/>
-                </a:solidFill>
-                <a:latin typeface="JetBrains Mono"/>
-                <a:ea typeface="JetBrains Mono"/>
-                <a:cs typeface="JetBrains Mono"/>
-              </a:rPr>
-              <a:t>"coffee"</a:t>
+              <a:t>Change the example so </a:t>
+            </a:r>
+            <a:r>
+              <a:rPr sz="2050" b="0">
+                <a:solidFill>
+                  <a:srgbClr val="6A1B9A"/>
+                </a:solidFill>
+                <a:highlight>
+                  <a:srgbClr val="ECEAF4"/>
+                </a:highlight>
+                <a:latin typeface="JetBrains Mono"/>
+                <a:ea typeface="JetBrains Mono"/>
+                <a:cs typeface="JetBrains Mono"/>
+              </a:rPr>
+              <a:t> survey </a:t>
             </a:r>
             <a:r>
               <a:rPr sz="2400" b="0">
@@ -7962,18 +7949,18 @@
                 <a:ea typeface="Calibri"/>
                 <a:cs typeface="Calibri"/>
               </a:rPr>
-              <a:t> as the fourth item in [survey]. Keep the </a:t>
-            </a:r>
-            <a:r>
-              <a:rPr sz="2400" b="0">
-                <a:solidFill>
-                  <a:srgbClr val="1750EB"/>
-                </a:solidFill>
-                <a:latin typeface="JetBrains Mono"/>
-                <a:ea typeface="JetBrains Mono"/>
-                <a:cs typeface="JetBrains Mono"/>
-              </a:rPr>
-              <a:t>for</a:t>
+              <a:t> holds </a:t>
+            </a:r>
+            <a:r>
+              <a:rPr sz="2050" b="0">
+                <a:solidFill>
+                  <a:srgbClr val="067D17"/>
+                </a:solidFill>
+                <a:latin typeface="JetBrains Mono"/>
+                <a:ea typeface="JetBrains Mono"/>
+                <a:cs typeface="JetBrains Mono"/>
+              </a:rPr>
+              <a:t>"tea"</a:t>
             </a:r>
             <a:r>
               <a:rPr sz="2400" b="0">
@@ -7984,18 +7971,18 @@
                 <a:ea typeface="Calibri"/>
                 <a:cs typeface="Calibri"/>
               </a:rPr>
-              <a:t> loop so every item is displayed, then display the new result from </a:t>
-            </a:r>
-            <a:r>
-              <a:rPr sz="2400" b="0">
-                <a:solidFill>
-                  <a:srgbClr val="1750EB"/>
-                </a:solidFill>
-                <a:latin typeface="JetBrains Mono"/>
-                <a:ea typeface="JetBrains Mono"/>
-                <a:cs typeface="JetBrains Mono"/>
-              </a:rPr>
-              <a:t>len()</a:t>
+              <a:t>, </a:t>
+            </a:r>
+            <a:r>
+              <a:rPr sz="2050" b="0">
+                <a:solidFill>
+                  <a:srgbClr val="067D17"/>
+                </a:solidFill>
+                <a:latin typeface="JetBrains Mono"/>
+                <a:ea typeface="JetBrains Mono"/>
+                <a:cs typeface="JetBrains Mono"/>
+              </a:rPr>
+              <a:t>"water"</a:t>
             </a:r>
             <a:r>
               <a:rPr sz="2400" b="0">
@@ -8006,10 +7993,10 @@
                 <a:ea typeface="Calibri"/>
                 <a:cs typeface="Calibri"/>
               </a:rPr>
-              <a:t>. The last item line must be </a:t>
-            </a:r>
-            <a:r>
-              <a:rPr sz="2400" b="0">
+              <a:t>, </a:t>
+            </a:r>
+            <a:r>
+              <a:rPr sz="2050" b="0">
                 <a:solidFill>
                   <a:srgbClr val="067D17"/>
                 </a:solidFill>
@@ -8017,7 +8004,7 @@
                 <a:ea typeface="JetBrains Mono"/>
                 <a:cs typeface="JetBrains Mono"/>
               </a:rPr>
-              <a:t>"Drink: coffee"</a:t>
+              <a:t>"tea"</a:t>
             </a:r>
             <a:r>
               <a:rPr sz="2400" b="0">
@@ -8028,18 +8015,84 @@
                 <a:ea typeface="Calibri"/>
                 <a:cs typeface="Calibri"/>
               </a:rPr>
-              <a:t> and the final line must be </a:t>
+              <a:t> and </a:t>
+            </a:r>
+            <a:r>
+              <a:rPr sz="2050" b="0">
+                <a:solidFill>
+                  <a:srgbClr val="067D17"/>
+                </a:solidFill>
+                <a:latin typeface="JetBrains Mono"/>
+                <a:ea typeface="JetBrains Mono"/>
+                <a:cs typeface="JetBrains Mono"/>
+              </a:rPr>
+              <a:t>"juice"</a:t>
             </a:r>
             <a:r>
               <a:rPr sz="2400" b="0">
                 <a:solidFill>
+                  <a:srgbClr val="080808"/>
+                </a:solidFill>
+                <a:latin typeface="Calibri"/>
+                <a:ea typeface="Calibri"/>
+                <a:cs typeface="Calibri"/>
+              </a:rPr>
+              <a:t>. Ask for a drink, then use the </a:t>
+            </a:r>
+            <a:r>
+              <a:rPr sz="2050" b="0">
+                <a:solidFill>
+                  <a:srgbClr val="1750EB"/>
+                </a:solidFill>
+                <a:latin typeface="JetBrains Mono"/>
+                <a:ea typeface="JetBrains Mono"/>
+                <a:cs typeface="JetBrains Mono"/>
+              </a:rPr>
+              <a:t>for</a:t>
+            </a:r>
+            <a:r>
+              <a:rPr sz="2400" b="0">
+                <a:solidFill>
+                  <a:srgbClr val="080808"/>
+                </a:solidFill>
+                <a:latin typeface="Calibri"/>
+                <a:ea typeface="Calibri"/>
+                <a:cs typeface="Calibri"/>
+              </a:rPr>
+              <a:t> loop and an </a:t>
+            </a:r>
+            <a:r>
+              <a:rPr sz="2050" b="0">
+                <a:solidFill>
+                  <a:srgbClr val="1750EB"/>
+                </a:solidFill>
+                <a:latin typeface="JetBrains Mono"/>
+                <a:ea typeface="JetBrains Mono"/>
+                <a:cs typeface="JetBrains Mono"/>
+              </a:rPr>
+              <a:t>if</a:t>
+            </a:r>
+            <a:r>
+              <a:rPr sz="2400" b="0">
+                <a:solidFill>
+                  <a:srgbClr val="080808"/>
+                </a:solidFill>
+                <a:latin typeface="Calibri"/>
+                <a:ea typeface="Calibri"/>
+                <a:cs typeface="Calibri"/>
+              </a:rPr>
+              <a:t> statement to count how many times it appears. Display the result, such as </a:t>
+            </a:r>
+            <a:r>
+              <a:rPr sz="2050" b="0">
+                <a:solidFill>
                   <a:srgbClr val="067D17"/>
                 </a:solidFill>
                 <a:latin typeface="JetBrains Mono"/>
                 <a:ea typeface="JetBrains Mono"/>
                 <a:cs typeface="JetBrains Mono"/>
               </a:rPr>
-              <a:t>"Total drinks: 4"</a:t>
+              <a:t>"tea appears 2 times"</a:t>
             </a:r>
             <a:r>
               <a:rPr sz="2400" b="0">
@@ -8697,18 +8750,18 @@
                 <a:ea typeface="Calibri"/>
                 <a:cs typeface="Calibri"/>
               </a:rPr>
-              <a:t>Store </a:t>
-            </a:r>
-            <a:r>
-              <a:rPr sz="2400" b="0">
-                <a:solidFill>
-                  <a:srgbClr val="067D17"/>
-                </a:solidFill>
-                <a:latin typeface="JetBrains Mono"/>
-                <a:ea typeface="JetBrains Mono"/>
-                <a:cs typeface="JetBrains Mono"/>
-              </a:rPr>
-              <a:t>"blue"</a:t>
+              <a:t>Create a </a:t>
+            </a:r>
+            <a:r>
+              <a:rPr sz="2050" b="0">
+                <a:solidFill>
+                  <a:srgbClr val="1750EB"/>
+                </a:solidFill>
+                <a:latin typeface="JetBrains Mono"/>
+                <a:ea typeface="JetBrains Mono"/>
+                <a:cs typeface="JetBrains Mono"/>
+              </a:rPr>
+              <a:t>list</a:t>
             </a:r>
             <a:r>
               <a:rPr sz="2400" b="0">
@@ -8719,18 +8772,21 @@
                 <a:ea typeface="Calibri"/>
                 <a:cs typeface="Calibri"/>
               </a:rPr>
-              <a:t>, </a:t>
-            </a:r>
-            <a:r>
-              <a:rPr sz="2400" b="0">
-                <a:solidFill>
-                  <a:srgbClr val="067D17"/>
-                </a:solidFill>
-                <a:latin typeface="JetBrains Mono"/>
-                <a:ea typeface="JetBrains Mono"/>
-                <a:cs typeface="JetBrains Mono"/>
-              </a:rPr>
-              <a:t>"green"</a:t>
+              <a:t> called </a:t>
+            </a:r>
+            <a:r>
+              <a:rPr sz="2050" b="0">
+                <a:solidFill>
+                  <a:srgbClr val="6A1B9A"/>
+                </a:solidFill>
+                <a:highlight>
+                  <a:srgbClr val="ECEAF4"/>
+                </a:highlight>
+                <a:latin typeface="JetBrains Mono"/>
+                <a:ea typeface="JetBrains Mono"/>
+                <a:cs typeface="JetBrains Mono"/>
+              </a:rPr>
+              <a:t> scores </a:t>
             </a:r>
             <a:r>
               <a:rPr sz="2400" b="0">
@@ -8741,18 +8797,18 @@
                 <a:ea typeface="Calibri"/>
                 <a:cs typeface="Calibri"/>
               </a:rPr>
-              <a:t> and </a:t>
-            </a:r>
-            <a:r>
-              <a:rPr sz="2400" b="0">
-                <a:solidFill>
-                  <a:srgbClr val="067D17"/>
-                </a:solidFill>
-                <a:latin typeface="JetBrains Mono"/>
-                <a:ea typeface="JetBrains Mono"/>
-                <a:cs typeface="JetBrains Mono"/>
-              </a:rPr>
-              <a:t>"red"</a:t>
+              <a:t> holding 12, 15, 9, 18 and 6. Use a </a:t>
+            </a:r>
+            <a:r>
+              <a:rPr sz="2050" b="0">
+                <a:solidFill>
+                  <a:srgbClr val="1750EB"/>
+                </a:solidFill>
+                <a:latin typeface="JetBrains Mono"/>
+                <a:ea typeface="JetBrains Mono"/>
+                <a:cs typeface="JetBrains Mono"/>
+              </a:rPr>
+              <a:t>for</a:t>
             </a:r>
             <a:r>
               <a:rPr sz="2400" b="0">
@@ -8763,18 +8819,21 @@
                 <a:ea typeface="Calibri"/>
                 <a:cs typeface="Calibri"/>
               </a:rPr>
-              <a:t> in [colours]. Use a </a:t>
-            </a:r>
-            <a:r>
-              <a:rPr sz="2400" b="0">
-                <a:solidFill>
-                  <a:srgbClr val="1750EB"/>
-                </a:solidFill>
-                <a:latin typeface="JetBrains Mono"/>
-                <a:ea typeface="JetBrains Mono"/>
-                <a:cs typeface="JetBrains Mono"/>
-              </a:rPr>
-              <a:t>for</a:t>
+              <a:t> loop to add each score to </a:t>
+            </a:r>
+            <a:r>
+              <a:rPr sz="2050" b="0">
+                <a:solidFill>
+                  <a:srgbClr val="6A1B9A"/>
+                </a:solidFill>
+                <a:highlight>
+                  <a:srgbClr val="ECEAF4"/>
+                </a:highlight>
+                <a:latin typeface="JetBrains Mono"/>
+                <a:ea typeface="JetBrains Mono"/>
+                <a:cs typeface="JetBrains Mono"/>
+              </a:rPr>
+              <a:t> total </a:t>
             </a:r>
             <a:r>
               <a:rPr sz="2400" b="0">
@@ -8785,10 +8844,10 @@
                 <a:ea typeface="Calibri"/>
                 <a:cs typeface="Calibri"/>
               </a:rPr>
-              <a:t> loop and [colour] to display each value after the label </a:t>
-            </a:r>
-            <a:r>
-              <a:rPr sz="2400" b="0">
+              <a:t>. Display </a:t>
+            </a:r>
+            <a:r>
+              <a:rPr sz="2050" b="0">
                 <a:solidFill>
                   <a:srgbClr val="067D17"/>
                 </a:solidFill>
@@ -8796,7 +8855,7 @@
                 <a:ea typeface="JetBrains Mono"/>
                 <a:cs typeface="JetBrains Mono"/>
               </a:rPr>
-              <a:t>"Colour:"</a:t>
+              <a:t>"Total:"</a:t>
             </a:r>
             <a:r>
               <a:rPr sz="2400" b="0">
@@ -8807,18 +8866,21 @@
                 <a:ea typeface="Calibri"/>
                 <a:cs typeface="Calibri"/>
               </a:rPr>
-              <a:t>. After the loop, display </a:t>
-            </a:r>
-            <a:r>
-              <a:rPr sz="2400" b="0">
-                <a:solidFill>
-                  <a:srgbClr val="067D17"/>
-                </a:solidFill>
-                <a:latin typeface="JetBrains Mono"/>
-                <a:ea typeface="JetBrains Mono"/>
-                <a:cs typeface="JetBrains Mono"/>
-              </a:rPr>
-              <a:t>"Number of answers:"</a:t>
+              <a:t> followed by </a:t>
+            </a:r>
+            <a:r>
+              <a:rPr sz="2050" b="0">
+                <a:solidFill>
+                  <a:srgbClr val="6A1B9A"/>
+                </a:solidFill>
+                <a:highlight>
+                  <a:srgbClr val="ECEAF4"/>
+                </a:highlight>
+                <a:latin typeface="JetBrains Mono"/>
+                <a:ea typeface="JetBrains Mono"/>
+                <a:cs typeface="JetBrains Mono"/>
+              </a:rPr>
+              <a:t> total </a:t>
             </a:r>
             <a:r>
               <a:rPr sz="2400" b="0">
@@ -8829,18 +8891,18 @@
                 <a:ea typeface="Calibri"/>
                 <a:cs typeface="Calibri"/>
               </a:rPr>
-              <a:t> followed by </a:t>
-            </a:r>
-            <a:r>
-              <a:rPr sz="2400" b="0">
-                <a:solidFill>
-                  <a:srgbClr val="1750EB"/>
-                </a:solidFill>
-                <a:latin typeface="JetBrains Mono"/>
-                <a:ea typeface="JetBrains Mono"/>
-                <a:cs typeface="JetBrains Mono"/>
-              </a:rPr>
-              <a:t>len</a:t>
+              <a:t>, then </a:t>
+            </a:r>
+            <a:r>
+              <a:rPr sz="2050" b="0">
+                <a:solidFill>
+                  <a:srgbClr val="067D17"/>
+                </a:solidFill>
+                <a:latin typeface="JetBrains Mono"/>
+                <a:ea typeface="JetBrains Mono"/>
+                <a:cs typeface="JetBrains Mono"/>
+              </a:rPr>
+              <a:t>"Average:"</a:t>
             </a:r>
             <a:r>
               <a:rPr sz="2400" b="0">
@@ -8851,18 +8913,87 @@
                 <a:ea typeface="Calibri"/>
                 <a:cs typeface="Calibri"/>
               </a:rPr>
-              <a:t>(colours). The final line must be </a:t>
+              <a:t> followed by </a:t>
+            </a:r>
+            <a:r>
+              <a:rPr sz="2050" b="0">
+                <a:solidFill>
+                  <a:srgbClr val="6A1B9A"/>
+                </a:solidFill>
+                <a:highlight>
+                  <a:srgbClr val="ECEAF4"/>
+                </a:highlight>
+                <a:latin typeface="JetBrains Mono"/>
+                <a:ea typeface="JetBrains Mono"/>
+                <a:cs typeface="JetBrains Mono"/>
+              </a:rPr>
+              <a:t> total </a:t>
             </a:r>
             <a:r>
               <a:rPr sz="2400" b="0">
                 <a:solidFill>
+                  <a:srgbClr val="080808"/>
+                </a:solidFill>
+                <a:latin typeface="Calibri"/>
+                <a:ea typeface="Calibri"/>
+                <a:cs typeface="Calibri"/>
+              </a:rPr>
+              <a:t> divided by </a:t>
+            </a:r>
+            <a:r>
+              <a:rPr sz="2050" b="0">
+                <a:solidFill>
+                  <a:srgbClr val="1750EB"/>
+                </a:solidFill>
+                <a:latin typeface="JetBrains Mono"/>
+                <a:ea typeface="JetBrains Mono"/>
+                <a:cs typeface="JetBrains Mono"/>
+              </a:rPr>
+              <a:t>len</a:t>
+            </a:r>
+            <a:r>
+              <a:rPr sz="2400" b="0">
+                <a:solidFill>
+                  <a:srgbClr val="080808"/>
+                </a:solidFill>
+                <a:latin typeface="Calibri"/>
+                <a:ea typeface="Calibri"/>
+                <a:cs typeface="Calibri"/>
+              </a:rPr>
+              <a:t>(scores). The output should be </a:t>
+            </a:r>
+            <a:r>
+              <a:rPr sz="2050" b="0">
+                <a:solidFill>
                   <a:srgbClr val="067D17"/>
                 </a:solidFill>
                 <a:latin typeface="JetBrains Mono"/>
                 <a:ea typeface="JetBrains Mono"/>
                 <a:cs typeface="JetBrains Mono"/>
               </a:rPr>
-              <a:t>"Number of answers: 3"</a:t>
+              <a:t>"Total: 60"</a:t>
+            </a:r>
+            <a:r>
+              <a:rPr sz="2400" b="0">
+                <a:solidFill>
+                  <a:srgbClr val="080808"/>
+                </a:solidFill>
+                <a:latin typeface="Calibri"/>
+                <a:ea typeface="Calibri"/>
+                <a:cs typeface="Calibri"/>
+              </a:rPr>
+              <a:t> and </a:t>
+            </a:r>
+            <a:r>
+              <a:rPr sz="2050" b="0">
+                <a:solidFill>
+                  <a:srgbClr val="067D17"/>
+                </a:solidFill>
+                <a:latin typeface="JetBrains Mono"/>
+                <a:ea typeface="JetBrains Mono"/>
+                <a:cs typeface="JetBrains Mono"/>
+              </a:rPr>
+              <a:t>"Average: 12.0"</a:t>
             </a:r>
             <a:r>
               <a:rPr sz="2400" b="0">

--- a/Mapped Curriculum Lessons/Grade 7/Lesson 25 - Working Through Lists/Working Through Lists - Slides.pptx
+++ b/Mapped Curriculum Lessons/Grade 7/Lesson 25 - Working Through Lists/Working Through Lists - Slides.pptx
@@ -2,28 +2,28 @@
 <file path=ppt/presentation.xml><?xml version="1.0" encoding="utf-8"?>
 <p:presentation xmlns:p="http://schemas.openxmlformats.org/presentationml/2006/main" embedTrueTypeFonts="1" saveSubsetFonts="0">
   <p:sldMasterIdLst>
-    <p:sldMasterId xmlns:r="http://schemas.openxmlformats.org/officeDocument/2006/relationships" id="2147483648" r:id="R5a1a9a064a734005"/>
+    <p:sldMasterId xmlns:r="http://schemas.openxmlformats.org/officeDocument/2006/relationships" id="2147483648" r:id="R099c71995b6d4930"/>
   </p:sldMasterIdLst>
   <p:notesMasterIdLst>
-    <p:notesMasterId xmlns:r="http://schemas.openxmlformats.org/officeDocument/2006/relationships" r:id="R77318918b8ca4239"/>
+    <p:notesMasterId xmlns:r="http://schemas.openxmlformats.org/officeDocument/2006/relationships" r:id="Rc2b6f20801894861"/>
   </p:notesMasterIdLst>
   <p:sldIdLst>
-    <p:sldId xmlns:r="http://schemas.openxmlformats.org/officeDocument/2006/relationships" id="256" r:id="R91306fd0d52d49c6"/>
-    <p:sldId xmlns:r="http://schemas.openxmlformats.org/officeDocument/2006/relationships" id="257" r:id="Rfd84fca170bf4a4e"/>
-    <p:sldId xmlns:r="http://schemas.openxmlformats.org/officeDocument/2006/relationships" id="258" r:id="R2cdddbde60314141"/>
-    <p:sldId xmlns:r="http://schemas.openxmlformats.org/officeDocument/2006/relationships" id="259" r:id="R1ca9ad390aef4daf"/>
-    <p:sldId xmlns:r="http://schemas.openxmlformats.org/officeDocument/2006/relationships" id="260" r:id="Rf57313170f064e6f"/>
-    <p:sldId xmlns:r="http://schemas.openxmlformats.org/officeDocument/2006/relationships" id="261" r:id="Rc2d3414da64042f8"/>
-    <p:sldId xmlns:r="http://schemas.openxmlformats.org/officeDocument/2006/relationships" id="262" r:id="R562daefee2a6490a"/>
-    <p:sldId xmlns:r="http://schemas.openxmlformats.org/officeDocument/2006/relationships" id="263" r:id="R5914054483184d15"/>
-    <p:sldId xmlns:r="http://schemas.openxmlformats.org/officeDocument/2006/relationships" id="264" r:id="R5461bd7af238486f"/>
+    <p:sldId xmlns:r="http://schemas.openxmlformats.org/officeDocument/2006/relationships" id="256" r:id="Ra6e4ee1d57b44784"/>
+    <p:sldId xmlns:r="http://schemas.openxmlformats.org/officeDocument/2006/relationships" id="257" r:id="R89765e658d4e47b1"/>
+    <p:sldId xmlns:r="http://schemas.openxmlformats.org/officeDocument/2006/relationships" id="258" r:id="R4f40115bd5124f0f"/>
+    <p:sldId xmlns:r="http://schemas.openxmlformats.org/officeDocument/2006/relationships" id="259" r:id="Ra796206cf4d9470f"/>
+    <p:sldId xmlns:r="http://schemas.openxmlformats.org/officeDocument/2006/relationships" id="260" r:id="Rce002502b65e4e35"/>
+    <p:sldId xmlns:r="http://schemas.openxmlformats.org/officeDocument/2006/relationships" id="261" r:id="R68a13c71ddc2466c"/>
+    <p:sldId xmlns:r="http://schemas.openxmlformats.org/officeDocument/2006/relationships" id="262" r:id="R73a7d4ee1a3b41cf"/>
+    <p:sldId xmlns:r="http://schemas.openxmlformats.org/officeDocument/2006/relationships" id="263" r:id="Rc3d67f86b814456c"/>
+    <p:sldId xmlns:r="http://schemas.openxmlformats.org/officeDocument/2006/relationships" id="264" r:id="Refe2be90d86b4bd7"/>
   </p:sldIdLst>
   <p:sldSz cx="12192000" cy="6858000"/>
   <p:notesSz cx="6858000" cy="9144000"/>
   <p:embeddedFontLst>
     <p:embeddedFont>
       <p:font typeface="JetBrains Mono"/>
-      <p:regular xmlns:r="http://schemas.openxmlformats.org/officeDocument/2006/relationships" r:id="R9991d307070e414e"/>
+      <p:regular xmlns:r="http://schemas.openxmlformats.org/officeDocument/2006/relationships" r:id="R108b9ce2cfe146eb"/>
     </p:embeddedFont>
   </p:embeddedFontLst>
 </p:presentation>
@@ -1071,7 +1071,7 @@
           <p:nvPr/>
         </p:nvPicPr>
         <p:blipFill rotWithShape="1">
-          <a:blip xmlns:r="http://schemas.openxmlformats.org/officeDocument/2006/relationships" xmlns:a="http://schemas.openxmlformats.org/drawingml/2006/main" r:embed="R6d60ca44a2a64f9f"/>
+          <a:blip xmlns:r="http://schemas.openxmlformats.org/officeDocument/2006/relationships" xmlns:a="http://schemas.openxmlformats.org/drawingml/2006/main" r:embed="R3db2e7a0ecf14708"/>
           <a:stretch xmlns:a="http://schemas.openxmlformats.org/drawingml/2006/main"/>
         </p:blipFill>
         <p:spPr>
@@ -1451,7 +1451,7 @@
           <p:nvPr/>
         </p:nvPicPr>
         <p:blipFill rotWithShape="1">
-          <a:blip xmlns:r="http://schemas.openxmlformats.org/officeDocument/2006/relationships" xmlns:a="http://schemas.openxmlformats.org/drawingml/2006/main" r:embed="Rbfecf872316c42b6">
+          <a:blip xmlns:r="http://schemas.openxmlformats.org/officeDocument/2006/relationships" xmlns:a="http://schemas.openxmlformats.org/drawingml/2006/main" r:embed="Rc27aadb2fd474e77">
             <a:alphaModFix amt="28000"/>
           </a:blip>
           <a:stretch xmlns:a="http://schemas.openxmlformats.org/drawingml/2006/main"/>
@@ -1664,7 +1664,7 @@
           <p:nvPr/>
         </p:nvPicPr>
         <p:blipFill rotWithShape="1">
-          <a:blip xmlns:r="http://schemas.openxmlformats.org/officeDocument/2006/relationships" xmlns:a="http://schemas.openxmlformats.org/drawingml/2006/main" r:embed="R729df5ee8b0c4844">
+          <a:blip xmlns:r="http://schemas.openxmlformats.org/officeDocument/2006/relationships" xmlns:a="http://schemas.openxmlformats.org/drawingml/2006/main" r:embed="Ra65d1731c2a644f0">
             <a:alphaModFix amt="28000"/>
           </a:blip>
           <a:stretch xmlns:a="http://schemas.openxmlformats.org/drawingml/2006/main"/>
@@ -1899,7 +1899,7 @@
           <p:nvPr/>
         </p:nvPicPr>
         <p:blipFill rotWithShape="1">
-          <a:blip xmlns:r="http://schemas.openxmlformats.org/officeDocument/2006/relationships" xmlns:a="http://schemas.openxmlformats.org/drawingml/2006/main" r:embed="R6a61778eaae24d60">
+          <a:blip xmlns:r="http://schemas.openxmlformats.org/officeDocument/2006/relationships" xmlns:a="http://schemas.openxmlformats.org/drawingml/2006/main" r:embed="R89a3602a14e54fa2">
             <a:alphaModFix amt="28000"/>
           </a:blip>
           <a:stretch xmlns:a="http://schemas.openxmlformats.org/drawingml/2006/main"/>
@@ -2176,7 +2176,7 @@
           <p:nvPr/>
         </p:nvPicPr>
         <p:blipFill rotWithShape="1">
-          <a:blip xmlns:r="http://schemas.openxmlformats.org/officeDocument/2006/relationships" xmlns:a="http://schemas.openxmlformats.org/drawingml/2006/main" r:embed="R5712b5385152451f">
+          <a:blip xmlns:r="http://schemas.openxmlformats.org/officeDocument/2006/relationships" xmlns:a="http://schemas.openxmlformats.org/drawingml/2006/main" r:embed="R54d413e487504377">
             <a:alphaModFix amt="28000"/>
           </a:blip>
           <a:stretch xmlns:a="http://schemas.openxmlformats.org/drawingml/2006/main"/>
@@ -2451,7 +2451,7 @@
           <p:nvPr/>
         </p:nvPicPr>
         <p:blipFill rotWithShape="1">
-          <a:blip xmlns:r="http://schemas.openxmlformats.org/officeDocument/2006/relationships" xmlns:a="http://schemas.openxmlformats.org/drawingml/2006/main" r:embed="R3aabd76c105b4757">
+          <a:blip xmlns:r="http://schemas.openxmlformats.org/officeDocument/2006/relationships" xmlns:a="http://schemas.openxmlformats.org/drawingml/2006/main" r:embed="R336d2128b2024b10">
             <a:alphaModFix amt="28000"/>
           </a:blip>
           <a:stretch xmlns:a="http://schemas.openxmlformats.org/drawingml/2006/main"/>
@@ -2875,7 +2875,7 @@
           <p:nvPr/>
         </p:nvPicPr>
         <p:blipFill rotWithShape="1">
-          <a:blip xmlns:r="http://schemas.openxmlformats.org/officeDocument/2006/relationships" xmlns:a="http://schemas.openxmlformats.org/drawingml/2006/main" r:embed="R5c15d3aa805c4926">
+          <a:blip xmlns:r="http://schemas.openxmlformats.org/officeDocument/2006/relationships" xmlns:a="http://schemas.openxmlformats.org/drawingml/2006/main" r:embed="R4b2d4ec44f1640e5">
             <a:alphaModFix amt="28000"/>
           </a:blip>
           <a:stretch xmlns:a="http://schemas.openxmlformats.org/drawingml/2006/main"/>
@@ -3016,7 +3016,7 @@
           <p:nvPr/>
         </p:nvPicPr>
         <p:blipFill rotWithShape="1">
-          <a:blip xmlns:r="http://schemas.openxmlformats.org/officeDocument/2006/relationships" xmlns:a="http://schemas.openxmlformats.org/drawingml/2006/main" r:embed="R170129a068e8437f">
+          <a:blip xmlns:r="http://schemas.openxmlformats.org/officeDocument/2006/relationships" xmlns:a="http://schemas.openxmlformats.org/drawingml/2006/main" r:embed="Rf61ce65e94fa4c0e">
             <a:alphaModFix amt="28000"/>
           </a:blip>
           <a:stretch xmlns:a="http://schemas.openxmlformats.org/drawingml/2006/main"/>
@@ -3130,7 +3130,7 @@
           <p:nvPr/>
         </p:nvPicPr>
         <p:blipFill rotWithShape="1">
-          <a:blip xmlns:r="http://schemas.openxmlformats.org/officeDocument/2006/relationships" xmlns:a="http://schemas.openxmlformats.org/drawingml/2006/main" r:embed="Rab0ffd827e034a2a">
+          <a:blip xmlns:r="http://schemas.openxmlformats.org/officeDocument/2006/relationships" xmlns:a="http://schemas.openxmlformats.org/drawingml/2006/main" r:embed="Re46335c257994746">
             <a:alphaModFix amt="28000"/>
           </a:blip>
           <a:stretch xmlns:a="http://schemas.openxmlformats.org/drawingml/2006/main"/>
@@ -3457,7 +3457,7 @@
           <p:nvPr/>
         </p:nvPicPr>
         <p:blipFill rotWithShape="1">
-          <a:blip xmlns:r="http://schemas.openxmlformats.org/officeDocument/2006/relationships" xmlns:a="http://schemas.openxmlformats.org/drawingml/2006/main" r:embed="R1cb70bf0d4834dcb">
+          <a:blip xmlns:r="http://schemas.openxmlformats.org/officeDocument/2006/relationships" xmlns:a="http://schemas.openxmlformats.org/drawingml/2006/main" r:embed="Rc81452c19df34bc7">
             <a:alphaModFix amt="28000"/>
           </a:blip>
           <a:stretch xmlns:a="http://schemas.openxmlformats.org/drawingml/2006/main"/>
@@ -3745,7 +3745,7 @@
           <p:nvPr/>
         </p:nvPicPr>
         <p:blipFill rotWithShape="1">
-          <a:blip xmlns:r="http://schemas.openxmlformats.org/officeDocument/2006/relationships" xmlns:a="http://schemas.openxmlformats.org/drawingml/2006/main" r:embed="R3f31c1ee6f8a4045">
+          <a:blip xmlns:r="http://schemas.openxmlformats.org/officeDocument/2006/relationships" xmlns:a="http://schemas.openxmlformats.org/drawingml/2006/main" r:embed="Rec930af8876e4ccb">
             <a:alphaModFix amt="28000"/>
           </a:blip>
           <a:stretch xmlns:a="http://schemas.openxmlformats.org/drawingml/2006/main"/>
@@ -3982,17 +3982,17 @@
   </p:cSld>
   <p:clrMap bg1="lt1" tx1="dk1" bg2="lt2" tx2="dk2" accent1="accent1" accent2="accent2" accent3="accent3" accent4="accent4" accent5="accent5" accent6="accent6" hlink="hlink" folHlink="folHlink"/>
   <p:sldLayoutIdLst>
-    <p:sldLayoutId xmlns:r="http://schemas.openxmlformats.org/officeDocument/2006/relationships" id="2147483649" r:id="Rc080d0ea1eeb435d"/>
-    <p:sldLayoutId xmlns:r="http://schemas.openxmlformats.org/officeDocument/2006/relationships" id="2147483650" r:id="Rb9d9c2d32da04d26"/>
-    <p:sldLayoutId xmlns:r="http://schemas.openxmlformats.org/officeDocument/2006/relationships" id="2147483651" r:id="Raf2cedb885eb4b2d"/>
-    <p:sldLayoutId xmlns:r="http://schemas.openxmlformats.org/officeDocument/2006/relationships" id="2147483652" r:id="Ra0ed351810db463b"/>
-    <p:sldLayoutId xmlns:r="http://schemas.openxmlformats.org/officeDocument/2006/relationships" id="2147483653" r:id="R3c9ac6bf3ad34599"/>
-    <p:sldLayoutId xmlns:r="http://schemas.openxmlformats.org/officeDocument/2006/relationships" id="2147483654" r:id="R1efb9ede0b114866"/>
-    <p:sldLayoutId xmlns:r="http://schemas.openxmlformats.org/officeDocument/2006/relationships" id="2147483655" r:id="Rd601cf0834034f0f"/>
-    <p:sldLayoutId xmlns:r="http://schemas.openxmlformats.org/officeDocument/2006/relationships" id="2147483656" r:id="Re39e1d0682784600"/>
-    <p:sldLayoutId xmlns:r="http://schemas.openxmlformats.org/officeDocument/2006/relationships" id="2147483657" r:id="Rbe3f41283b4c4cd8"/>
-    <p:sldLayoutId xmlns:r="http://schemas.openxmlformats.org/officeDocument/2006/relationships" id="2147483658" r:id="Rc94d1a49ad294a54"/>
-    <p:sldLayoutId xmlns:r="http://schemas.openxmlformats.org/officeDocument/2006/relationships" id="2147483659" r:id="Raac6215fbb1b4baf"/>
+    <p:sldLayoutId xmlns:r="http://schemas.openxmlformats.org/officeDocument/2006/relationships" id="2147483649" r:id="Re2482f175e984a0e"/>
+    <p:sldLayoutId xmlns:r="http://schemas.openxmlformats.org/officeDocument/2006/relationships" id="2147483650" r:id="Rc83f10a0a10543d6"/>
+    <p:sldLayoutId xmlns:r="http://schemas.openxmlformats.org/officeDocument/2006/relationships" id="2147483651" r:id="R62c92b62d41d4cd6"/>
+    <p:sldLayoutId xmlns:r="http://schemas.openxmlformats.org/officeDocument/2006/relationships" id="2147483652" r:id="Rfdd62ee0132e4169"/>
+    <p:sldLayoutId xmlns:r="http://schemas.openxmlformats.org/officeDocument/2006/relationships" id="2147483653" r:id="R12a0e83c5d7344e0"/>
+    <p:sldLayoutId xmlns:r="http://schemas.openxmlformats.org/officeDocument/2006/relationships" id="2147483654" r:id="R26df543507bc4ed0"/>
+    <p:sldLayoutId xmlns:r="http://schemas.openxmlformats.org/officeDocument/2006/relationships" id="2147483655" r:id="R54504f42d58f4cc2"/>
+    <p:sldLayoutId xmlns:r="http://schemas.openxmlformats.org/officeDocument/2006/relationships" id="2147483656" r:id="R915d4f02066c4c8f"/>
+    <p:sldLayoutId xmlns:r="http://schemas.openxmlformats.org/officeDocument/2006/relationships" id="2147483657" r:id="R325c1c66675e4c1c"/>
+    <p:sldLayoutId xmlns:r="http://schemas.openxmlformats.org/officeDocument/2006/relationships" id="2147483658" r:id="R95a648be37ca4fe8"/>
+    <p:sldLayoutId xmlns:r="http://schemas.openxmlformats.org/officeDocument/2006/relationships" id="2147483659" r:id="R991a57fb97d54352"/>
   </p:sldLayoutIdLst>
   <p:hf hdr="0" ftr="0" dt="0"/>
   <p:txStyles>
@@ -4983,7 +4983,7 @@
             <a:r>
               <a:rPr sz="2400">
                 <a:solidFill>
-                  <a:srgbClr val="1750EB"/>
+                  <a:srgbClr val="C45E00"/>
                 </a:solidFill>
                 <a:latin typeface="JetBrains Mono"/>
                 <a:ea typeface="JetBrains Mono"/>
@@ -5005,7 +5005,7 @@
             <a:r>
               <a:rPr sz="2400">
                 <a:solidFill>
-                  <a:srgbClr val="1750EB"/>
+                  <a:srgbClr val="C45E00"/>
                 </a:solidFill>
                 <a:latin typeface="JetBrains Mono"/>
                 <a:ea typeface="JetBrains Mono"/>
@@ -5534,7 +5534,7 @@
             <a:r>
               <a:rPr sz="2400">
                 <a:solidFill>
-                  <a:srgbClr val="1750EB"/>
+                  <a:srgbClr val="C45E00"/>
                 </a:solidFill>
                 <a:latin typeface="JetBrains Mono"/>
                 <a:ea typeface="JetBrains Mono"/>
@@ -5556,7 +5556,7 @@
             <a:r>
               <a:rPr sz="2400">
                 <a:solidFill>
-                  <a:srgbClr val="1750EB"/>
+                  <a:srgbClr val="C45E00"/>
                 </a:solidFill>
                 <a:latin typeface="JetBrains Mono"/>
                 <a:ea typeface="JetBrains Mono"/>
@@ -6085,7 +6085,7 @@
             <a:r>
               <a:rPr sz="2400">
                 <a:solidFill>
-                  <a:srgbClr val="1750EB"/>
+                  <a:srgbClr val="C45E00"/>
                 </a:solidFill>
                 <a:latin typeface="JetBrains Mono"/>
                 <a:ea typeface="JetBrains Mono"/>
@@ -6107,7 +6107,7 @@
             <a:r>
               <a:rPr sz="2400">
                 <a:solidFill>
-                  <a:srgbClr val="1750EB"/>
+                  <a:srgbClr val="C45E00"/>
                 </a:solidFill>
                 <a:latin typeface="JetBrains Mono"/>
                 <a:ea typeface="JetBrains Mono"/>
@@ -6877,7 +6877,7 @@
             <a:r>
               <a:rPr sz="1600">
                 <a:solidFill>
-                  <a:srgbClr val="1750EB"/>
+                  <a:srgbClr val="C45E00"/>
                 </a:solidFill>
                 <a:latin typeface="JetBrains Mono"/>
                 <a:ea typeface="JetBrains Mono"/>
@@ -6899,7 +6899,7 @@
             <a:r>
               <a:rPr sz="1600">
                 <a:solidFill>
-                  <a:srgbClr val="1750EB"/>
+                  <a:srgbClr val="C45E00"/>
                 </a:solidFill>
                 <a:latin typeface="JetBrains Mono"/>
                 <a:ea typeface="JetBrains Mono"/>
@@ -7191,7 +7191,7 @@
             <a:r>
               <a:rPr sz="2050" b="0">
                 <a:solidFill>
-                  <a:srgbClr val="1750EB"/>
+                  <a:srgbClr val="C45E00"/>
                 </a:solidFill>
                 <a:latin typeface="JetBrains Mono"/>
                 <a:ea typeface="JetBrains Mono"/>
@@ -7640,7 +7640,7 @@
             <a:r>
               <a:rPr sz="1600">
                 <a:solidFill>
-                  <a:srgbClr val="1750EB"/>
+                  <a:srgbClr val="C45E00"/>
                 </a:solidFill>
                 <a:latin typeface="JetBrains Mono"/>
                 <a:ea typeface="JetBrains Mono"/>
@@ -7662,7 +7662,7 @@
             <a:r>
               <a:rPr sz="1600">
                 <a:solidFill>
-                  <a:srgbClr val="1750EB"/>
+                  <a:srgbClr val="C45E00"/>
                 </a:solidFill>
                 <a:latin typeface="JetBrains Mono"/>
                 <a:ea typeface="JetBrains Mono"/>
@@ -8042,7 +8042,7 @@
             <a:r>
               <a:rPr sz="2050" b="0">
                 <a:solidFill>
-                  <a:srgbClr val="1750EB"/>
+                  <a:srgbClr val="C45E00"/>
                 </a:solidFill>
                 <a:latin typeface="JetBrains Mono"/>
                 <a:ea typeface="JetBrains Mono"/>
@@ -8064,7 +8064,7 @@
             <a:r>
               <a:rPr sz="2050" b="0">
                 <a:solidFill>
-                  <a:srgbClr val="1750EB"/>
+                  <a:srgbClr val="C45E00"/>
                 </a:solidFill>
                 <a:latin typeface="JetBrains Mono"/>
                 <a:ea typeface="JetBrains Mono"/>
@@ -8466,7 +8466,7 @@
             <a:r>
               <a:rPr sz="1600">
                 <a:solidFill>
-                  <a:srgbClr val="1750EB"/>
+                  <a:srgbClr val="C45E00"/>
                 </a:solidFill>
                 <a:latin typeface="JetBrains Mono"/>
                 <a:ea typeface="JetBrains Mono"/>
@@ -8488,7 +8488,7 @@
             <a:r>
               <a:rPr sz="1600">
                 <a:solidFill>
-                  <a:srgbClr val="1750EB"/>
+                  <a:srgbClr val="C45E00"/>
                 </a:solidFill>
                 <a:latin typeface="JetBrains Mono"/>
                 <a:ea typeface="JetBrains Mono"/>
@@ -8802,7 +8802,7 @@
             <a:r>
               <a:rPr sz="2050" b="0">
                 <a:solidFill>
-                  <a:srgbClr val="1750EB"/>
+                  <a:srgbClr val="C45E00"/>
                 </a:solidFill>
                 <a:latin typeface="JetBrains Mono"/>
                 <a:ea typeface="JetBrains Mono"/>
@@ -9367,7 +9367,7 @@
             <a:r>
               <a:rPr sz="1600">
                 <a:solidFill>
-                  <a:srgbClr val="1750EB"/>
+                  <a:srgbClr val="C45E00"/>
                 </a:solidFill>
                 <a:latin typeface="JetBrains Mono"/>
                 <a:ea typeface="JetBrains Mono"/>
@@ -9389,7 +9389,7 @@
             <a:r>
               <a:rPr sz="1600">
                 <a:solidFill>
-                  <a:srgbClr val="1750EB"/>
+                  <a:srgbClr val="C45E00"/>
                 </a:solidFill>
                 <a:latin typeface="JetBrains Mono"/>
                 <a:ea typeface="JetBrains Mono"/>
@@ -9770,7 +9770,7 @@
             <a:r>
               <a:rPr sz="1800">
                 <a:solidFill>
-                  <a:srgbClr val="1750EB"/>
+                  <a:srgbClr val="C45E00"/>
                 </a:solidFill>
                 <a:latin typeface="JetBrains Mono"/>
                 <a:ea typeface="JetBrains Mono"/>
@@ -9792,7 +9792,7 @@
             <a:r>
               <a:rPr sz="1800">
                 <a:solidFill>
-                  <a:srgbClr val="1750EB"/>
+                  <a:srgbClr val="C45E00"/>
                 </a:solidFill>
                 <a:latin typeface="JetBrains Mono"/>
                 <a:ea typeface="JetBrains Mono"/>

--- a/Mapped Curriculum Lessons/Grade 7/Lesson 25 - Working Through Lists/Working Through Lists - Slides.pptx
+++ b/Mapped Curriculum Lessons/Grade 7/Lesson 25 - Working Through Lists/Working Through Lists - Slides.pptx
@@ -2,28 +2,28 @@
 <file path=ppt/presentation.xml><?xml version="1.0" encoding="utf-8"?>
 <p:presentation xmlns:p="http://schemas.openxmlformats.org/presentationml/2006/main" embedTrueTypeFonts="1" saveSubsetFonts="0">
   <p:sldMasterIdLst>
-    <p:sldMasterId xmlns:r="http://schemas.openxmlformats.org/officeDocument/2006/relationships" id="2147483648" r:id="R099c71995b6d4930"/>
+    <p:sldMasterId xmlns:r="http://schemas.openxmlformats.org/officeDocument/2006/relationships" id="2147483648" r:id="Rcac5ae8152c24f10"/>
   </p:sldMasterIdLst>
   <p:notesMasterIdLst>
-    <p:notesMasterId xmlns:r="http://schemas.openxmlformats.org/officeDocument/2006/relationships" r:id="Rc2b6f20801894861"/>
+    <p:notesMasterId xmlns:r="http://schemas.openxmlformats.org/officeDocument/2006/relationships" r:id="Rf09d91c8a6e64884"/>
   </p:notesMasterIdLst>
   <p:sldIdLst>
-    <p:sldId xmlns:r="http://schemas.openxmlformats.org/officeDocument/2006/relationships" id="256" r:id="Ra6e4ee1d57b44784"/>
-    <p:sldId xmlns:r="http://schemas.openxmlformats.org/officeDocument/2006/relationships" id="257" r:id="R89765e658d4e47b1"/>
-    <p:sldId xmlns:r="http://schemas.openxmlformats.org/officeDocument/2006/relationships" id="258" r:id="R4f40115bd5124f0f"/>
-    <p:sldId xmlns:r="http://schemas.openxmlformats.org/officeDocument/2006/relationships" id="259" r:id="Ra796206cf4d9470f"/>
-    <p:sldId xmlns:r="http://schemas.openxmlformats.org/officeDocument/2006/relationships" id="260" r:id="Rce002502b65e4e35"/>
-    <p:sldId xmlns:r="http://schemas.openxmlformats.org/officeDocument/2006/relationships" id="261" r:id="R68a13c71ddc2466c"/>
-    <p:sldId xmlns:r="http://schemas.openxmlformats.org/officeDocument/2006/relationships" id="262" r:id="R73a7d4ee1a3b41cf"/>
-    <p:sldId xmlns:r="http://schemas.openxmlformats.org/officeDocument/2006/relationships" id="263" r:id="Rc3d67f86b814456c"/>
-    <p:sldId xmlns:r="http://schemas.openxmlformats.org/officeDocument/2006/relationships" id="264" r:id="Refe2be90d86b4bd7"/>
+    <p:sldId xmlns:r="http://schemas.openxmlformats.org/officeDocument/2006/relationships" id="256" r:id="R2e19c706fe964c65"/>
+    <p:sldId xmlns:r="http://schemas.openxmlformats.org/officeDocument/2006/relationships" id="257" r:id="R506c751ad89d4187"/>
+    <p:sldId xmlns:r="http://schemas.openxmlformats.org/officeDocument/2006/relationships" id="258" r:id="Rc346f13b8f324fc9"/>
+    <p:sldId xmlns:r="http://schemas.openxmlformats.org/officeDocument/2006/relationships" id="259" r:id="R42376efd40bb42df"/>
+    <p:sldId xmlns:r="http://schemas.openxmlformats.org/officeDocument/2006/relationships" id="260" r:id="Re7cacf22d9b145e0"/>
+    <p:sldId xmlns:r="http://schemas.openxmlformats.org/officeDocument/2006/relationships" id="261" r:id="R2a34bd6460a1477c"/>
+    <p:sldId xmlns:r="http://schemas.openxmlformats.org/officeDocument/2006/relationships" id="262" r:id="R15f54fc9e797423b"/>
+    <p:sldId xmlns:r="http://schemas.openxmlformats.org/officeDocument/2006/relationships" id="263" r:id="Rab707586f30a4b6a"/>
+    <p:sldId xmlns:r="http://schemas.openxmlformats.org/officeDocument/2006/relationships" id="264" r:id="Re7c89ab609134dfa"/>
   </p:sldIdLst>
   <p:sldSz cx="12192000" cy="6858000"/>
   <p:notesSz cx="6858000" cy="9144000"/>
   <p:embeddedFontLst>
     <p:embeddedFont>
       <p:font typeface="JetBrains Mono"/>
-      <p:regular xmlns:r="http://schemas.openxmlformats.org/officeDocument/2006/relationships" r:id="R108b9ce2cfe146eb"/>
+      <p:regular xmlns:r="http://schemas.openxmlformats.org/officeDocument/2006/relationships" r:id="Re76a69b15df84ea2"/>
     </p:embeddedFont>
   </p:embeddedFontLst>
 </p:presentation>
@@ -1071,7 +1071,7 @@
           <p:nvPr/>
         </p:nvPicPr>
         <p:blipFill rotWithShape="1">
-          <a:blip xmlns:r="http://schemas.openxmlformats.org/officeDocument/2006/relationships" xmlns:a="http://schemas.openxmlformats.org/drawingml/2006/main" r:embed="R3db2e7a0ecf14708"/>
+          <a:blip xmlns:r="http://schemas.openxmlformats.org/officeDocument/2006/relationships" xmlns:a="http://schemas.openxmlformats.org/drawingml/2006/main" r:embed="R29075f84330d433f"/>
           <a:stretch xmlns:a="http://schemas.openxmlformats.org/drawingml/2006/main"/>
         </p:blipFill>
         <p:spPr>
@@ -1451,7 +1451,7 @@
           <p:nvPr/>
         </p:nvPicPr>
         <p:blipFill rotWithShape="1">
-          <a:blip xmlns:r="http://schemas.openxmlformats.org/officeDocument/2006/relationships" xmlns:a="http://schemas.openxmlformats.org/drawingml/2006/main" r:embed="Rc27aadb2fd474e77">
+          <a:blip xmlns:r="http://schemas.openxmlformats.org/officeDocument/2006/relationships" xmlns:a="http://schemas.openxmlformats.org/drawingml/2006/main" r:embed="R2a42ca63870b4fc6">
             <a:alphaModFix amt="28000"/>
           </a:blip>
           <a:stretch xmlns:a="http://schemas.openxmlformats.org/drawingml/2006/main"/>
@@ -1664,7 +1664,7 @@
           <p:nvPr/>
         </p:nvPicPr>
         <p:blipFill rotWithShape="1">
-          <a:blip xmlns:r="http://schemas.openxmlformats.org/officeDocument/2006/relationships" xmlns:a="http://schemas.openxmlformats.org/drawingml/2006/main" r:embed="Ra65d1731c2a644f0">
+          <a:blip xmlns:r="http://schemas.openxmlformats.org/officeDocument/2006/relationships" xmlns:a="http://schemas.openxmlformats.org/drawingml/2006/main" r:embed="Ra6f592d1d9154c58">
             <a:alphaModFix amt="28000"/>
           </a:blip>
           <a:stretch xmlns:a="http://schemas.openxmlformats.org/drawingml/2006/main"/>
@@ -1899,7 +1899,7 @@
           <p:nvPr/>
         </p:nvPicPr>
         <p:blipFill rotWithShape="1">
-          <a:blip xmlns:r="http://schemas.openxmlformats.org/officeDocument/2006/relationships" xmlns:a="http://schemas.openxmlformats.org/drawingml/2006/main" r:embed="R89a3602a14e54fa2">
+          <a:blip xmlns:r="http://schemas.openxmlformats.org/officeDocument/2006/relationships" xmlns:a="http://schemas.openxmlformats.org/drawingml/2006/main" r:embed="R948038b2ee0640b9">
             <a:alphaModFix amt="28000"/>
           </a:blip>
           <a:stretch xmlns:a="http://schemas.openxmlformats.org/drawingml/2006/main"/>
@@ -2176,7 +2176,7 @@
           <p:nvPr/>
         </p:nvPicPr>
         <p:blipFill rotWithShape="1">
-          <a:blip xmlns:r="http://schemas.openxmlformats.org/officeDocument/2006/relationships" xmlns:a="http://schemas.openxmlformats.org/drawingml/2006/main" r:embed="R54d413e487504377">
+          <a:blip xmlns:r="http://schemas.openxmlformats.org/officeDocument/2006/relationships" xmlns:a="http://schemas.openxmlformats.org/drawingml/2006/main" r:embed="R75ccf5a2ffa5493c">
             <a:alphaModFix amt="28000"/>
           </a:blip>
           <a:stretch xmlns:a="http://schemas.openxmlformats.org/drawingml/2006/main"/>
@@ -2451,7 +2451,7 @@
           <p:nvPr/>
         </p:nvPicPr>
         <p:blipFill rotWithShape="1">
-          <a:blip xmlns:r="http://schemas.openxmlformats.org/officeDocument/2006/relationships" xmlns:a="http://schemas.openxmlformats.org/drawingml/2006/main" r:embed="R336d2128b2024b10">
+          <a:blip xmlns:r="http://schemas.openxmlformats.org/officeDocument/2006/relationships" xmlns:a="http://schemas.openxmlformats.org/drawingml/2006/main" r:embed="Raa24f8ecce0e44ae">
             <a:alphaModFix amt="28000"/>
           </a:blip>
           <a:stretch xmlns:a="http://schemas.openxmlformats.org/drawingml/2006/main"/>
@@ -2875,7 +2875,7 @@
           <p:nvPr/>
         </p:nvPicPr>
         <p:blipFill rotWithShape="1">
-          <a:blip xmlns:r="http://schemas.openxmlformats.org/officeDocument/2006/relationships" xmlns:a="http://schemas.openxmlformats.org/drawingml/2006/main" r:embed="R4b2d4ec44f1640e5">
+          <a:blip xmlns:r="http://schemas.openxmlformats.org/officeDocument/2006/relationships" xmlns:a="http://schemas.openxmlformats.org/drawingml/2006/main" r:embed="Re8887284458b4d6d">
             <a:alphaModFix amt="28000"/>
           </a:blip>
           <a:stretch xmlns:a="http://schemas.openxmlformats.org/drawingml/2006/main"/>
@@ -3016,7 +3016,7 @@
           <p:nvPr/>
         </p:nvPicPr>
         <p:blipFill rotWithShape="1">
-          <a:blip xmlns:r="http://schemas.openxmlformats.org/officeDocument/2006/relationships" xmlns:a="http://schemas.openxmlformats.org/drawingml/2006/main" r:embed="Rf61ce65e94fa4c0e">
+          <a:blip xmlns:r="http://schemas.openxmlformats.org/officeDocument/2006/relationships" xmlns:a="http://schemas.openxmlformats.org/drawingml/2006/main" r:embed="R4b905d1237084427">
             <a:alphaModFix amt="28000"/>
           </a:blip>
           <a:stretch xmlns:a="http://schemas.openxmlformats.org/drawingml/2006/main"/>
@@ -3130,7 +3130,7 @@
           <p:nvPr/>
         </p:nvPicPr>
         <p:blipFill rotWithShape="1">
-          <a:blip xmlns:r="http://schemas.openxmlformats.org/officeDocument/2006/relationships" xmlns:a="http://schemas.openxmlformats.org/drawingml/2006/main" r:embed="Re46335c257994746">
+          <a:blip xmlns:r="http://schemas.openxmlformats.org/officeDocument/2006/relationships" xmlns:a="http://schemas.openxmlformats.org/drawingml/2006/main" r:embed="Re234562475654fba">
             <a:alphaModFix amt="28000"/>
           </a:blip>
           <a:stretch xmlns:a="http://schemas.openxmlformats.org/drawingml/2006/main"/>
@@ -3457,7 +3457,7 @@
           <p:nvPr/>
         </p:nvPicPr>
         <p:blipFill rotWithShape="1">
-          <a:blip xmlns:r="http://schemas.openxmlformats.org/officeDocument/2006/relationships" xmlns:a="http://schemas.openxmlformats.org/drawingml/2006/main" r:embed="Rc81452c19df34bc7">
+          <a:blip xmlns:r="http://schemas.openxmlformats.org/officeDocument/2006/relationships" xmlns:a="http://schemas.openxmlformats.org/drawingml/2006/main" r:embed="Rab1f883ca3ca4a86">
             <a:alphaModFix amt="28000"/>
           </a:blip>
           <a:stretch xmlns:a="http://schemas.openxmlformats.org/drawingml/2006/main"/>
@@ -3745,7 +3745,7 @@
           <p:nvPr/>
         </p:nvPicPr>
         <p:blipFill rotWithShape="1">
-          <a:blip xmlns:r="http://schemas.openxmlformats.org/officeDocument/2006/relationships" xmlns:a="http://schemas.openxmlformats.org/drawingml/2006/main" r:embed="Rec930af8876e4ccb">
+          <a:blip xmlns:r="http://schemas.openxmlformats.org/officeDocument/2006/relationships" xmlns:a="http://schemas.openxmlformats.org/drawingml/2006/main" r:embed="Rb3773ccf1b5f4802">
             <a:alphaModFix amt="28000"/>
           </a:blip>
           <a:stretch xmlns:a="http://schemas.openxmlformats.org/drawingml/2006/main"/>
@@ -3982,17 +3982,17 @@
   </p:cSld>
   <p:clrMap bg1="lt1" tx1="dk1" bg2="lt2" tx2="dk2" accent1="accent1" accent2="accent2" accent3="accent3" accent4="accent4" accent5="accent5" accent6="accent6" hlink="hlink" folHlink="folHlink"/>
   <p:sldLayoutIdLst>
-    <p:sldLayoutId xmlns:r="http://schemas.openxmlformats.org/officeDocument/2006/relationships" id="2147483649" r:id="Re2482f175e984a0e"/>
-    <p:sldLayoutId xmlns:r="http://schemas.openxmlformats.org/officeDocument/2006/relationships" id="2147483650" r:id="Rc83f10a0a10543d6"/>
-    <p:sldLayoutId xmlns:r="http://schemas.openxmlformats.org/officeDocument/2006/relationships" id="2147483651" r:id="R62c92b62d41d4cd6"/>
-    <p:sldLayoutId xmlns:r="http://schemas.openxmlformats.org/officeDocument/2006/relationships" id="2147483652" r:id="Rfdd62ee0132e4169"/>
-    <p:sldLayoutId xmlns:r="http://schemas.openxmlformats.org/officeDocument/2006/relationships" id="2147483653" r:id="R12a0e83c5d7344e0"/>
-    <p:sldLayoutId xmlns:r="http://schemas.openxmlformats.org/officeDocument/2006/relationships" id="2147483654" r:id="R26df543507bc4ed0"/>
-    <p:sldLayoutId xmlns:r="http://schemas.openxmlformats.org/officeDocument/2006/relationships" id="2147483655" r:id="R54504f42d58f4cc2"/>
-    <p:sldLayoutId xmlns:r="http://schemas.openxmlformats.org/officeDocument/2006/relationships" id="2147483656" r:id="R915d4f02066c4c8f"/>
-    <p:sldLayoutId xmlns:r="http://schemas.openxmlformats.org/officeDocument/2006/relationships" id="2147483657" r:id="R325c1c66675e4c1c"/>
-    <p:sldLayoutId xmlns:r="http://schemas.openxmlformats.org/officeDocument/2006/relationships" id="2147483658" r:id="R95a648be37ca4fe8"/>
-    <p:sldLayoutId xmlns:r="http://schemas.openxmlformats.org/officeDocument/2006/relationships" id="2147483659" r:id="R991a57fb97d54352"/>
+    <p:sldLayoutId xmlns:r="http://schemas.openxmlformats.org/officeDocument/2006/relationships" id="2147483649" r:id="R7f250c32b25e4d8c"/>
+    <p:sldLayoutId xmlns:r="http://schemas.openxmlformats.org/officeDocument/2006/relationships" id="2147483650" r:id="Ra1b30a5b8a1a4f49"/>
+    <p:sldLayoutId xmlns:r="http://schemas.openxmlformats.org/officeDocument/2006/relationships" id="2147483651" r:id="Rc28d0a9f3e054f72"/>
+    <p:sldLayoutId xmlns:r="http://schemas.openxmlformats.org/officeDocument/2006/relationships" id="2147483652" r:id="R6802a12ef8ac4951"/>
+    <p:sldLayoutId xmlns:r="http://schemas.openxmlformats.org/officeDocument/2006/relationships" id="2147483653" r:id="Re18b6f76ca0f407d"/>
+    <p:sldLayoutId xmlns:r="http://schemas.openxmlformats.org/officeDocument/2006/relationships" id="2147483654" r:id="R4afcd7f3e0c24b1d"/>
+    <p:sldLayoutId xmlns:r="http://schemas.openxmlformats.org/officeDocument/2006/relationships" id="2147483655" r:id="R1f5316f272eb4e97"/>
+    <p:sldLayoutId xmlns:r="http://schemas.openxmlformats.org/officeDocument/2006/relationships" id="2147483656" r:id="Rdfa47c3282ee424e"/>
+    <p:sldLayoutId xmlns:r="http://schemas.openxmlformats.org/officeDocument/2006/relationships" id="2147483657" r:id="Rb88e5232b3ab4a7e"/>
+    <p:sldLayoutId xmlns:r="http://schemas.openxmlformats.org/officeDocument/2006/relationships" id="2147483658" r:id="R3b883eea7e214ecb"/>
+    <p:sldLayoutId xmlns:r="http://schemas.openxmlformats.org/officeDocument/2006/relationships" id="2147483659" r:id="R4cbf175e46ec49aa"/>
   </p:sldLayoutIdLst>
   <p:hf hdr="0" ftr="0" dt="0"/>
   <p:txStyles>

--- a/Mapped Curriculum Lessons/Grade 7/Lesson 25 - Working Through Lists/Working Through Lists - Slides.pptx
+++ b/Mapped Curriculum Lessons/Grade 7/Lesson 25 - Working Through Lists/Working Through Lists - Slides.pptx
@@ -2,28 +2,28 @@
 <file path=ppt/presentation.xml><?xml version="1.0" encoding="utf-8"?>
 <p:presentation xmlns:p="http://schemas.openxmlformats.org/presentationml/2006/main" embedTrueTypeFonts="1" saveSubsetFonts="0">
   <p:sldMasterIdLst>
-    <p:sldMasterId xmlns:r="http://schemas.openxmlformats.org/officeDocument/2006/relationships" id="2147483648" r:id="Rcac5ae8152c24f10"/>
+    <p:sldMasterId xmlns:r="http://schemas.openxmlformats.org/officeDocument/2006/relationships" id="2147483648" r:id="R5bb82cb987a246a6"/>
   </p:sldMasterIdLst>
   <p:notesMasterIdLst>
-    <p:notesMasterId xmlns:r="http://schemas.openxmlformats.org/officeDocument/2006/relationships" r:id="Rf09d91c8a6e64884"/>
+    <p:notesMasterId xmlns:r="http://schemas.openxmlformats.org/officeDocument/2006/relationships" r:id="R27f4bd0173ac49d5"/>
   </p:notesMasterIdLst>
   <p:sldIdLst>
-    <p:sldId xmlns:r="http://schemas.openxmlformats.org/officeDocument/2006/relationships" id="256" r:id="R2e19c706fe964c65"/>
-    <p:sldId xmlns:r="http://schemas.openxmlformats.org/officeDocument/2006/relationships" id="257" r:id="R506c751ad89d4187"/>
-    <p:sldId xmlns:r="http://schemas.openxmlformats.org/officeDocument/2006/relationships" id="258" r:id="Rc346f13b8f324fc9"/>
-    <p:sldId xmlns:r="http://schemas.openxmlformats.org/officeDocument/2006/relationships" id="259" r:id="R42376efd40bb42df"/>
-    <p:sldId xmlns:r="http://schemas.openxmlformats.org/officeDocument/2006/relationships" id="260" r:id="Re7cacf22d9b145e0"/>
-    <p:sldId xmlns:r="http://schemas.openxmlformats.org/officeDocument/2006/relationships" id="261" r:id="R2a34bd6460a1477c"/>
-    <p:sldId xmlns:r="http://schemas.openxmlformats.org/officeDocument/2006/relationships" id="262" r:id="R15f54fc9e797423b"/>
-    <p:sldId xmlns:r="http://schemas.openxmlformats.org/officeDocument/2006/relationships" id="263" r:id="Rab707586f30a4b6a"/>
-    <p:sldId xmlns:r="http://schemas.openxmlformats.org/officeDocument/2006/relationships" id="264" r:id="Re7c89ab609134dfa"/>
+    <p:sldId xmlns:r="http://schemas.openxmlformats.org/officeDocument/2006/relationships" id="256" r:id="R77591258ca544929"/>
+    <p:sldId xmlns:r="http://schemas.openxmlformats.org/officeDocument/2006/relationships" id="257" r:id="Rd73affbe50da4602"/>
+    <p:sldId xmlns:r="http://schemas.openxmlformats.org/officeDocument/2006/relationships" id="258" r:id="Rc542822229734cf0"/>
+    <p:sldId xmlns:r="http://schemas.openxmlformats.org/officeDocument/2006/relationships" id="259" r:id="R122e7bead02e4bfe"/>
+    <p:sldId xmlns:r="http://schemas.openxmlformats.org/officeDocument/2006/relationships" id="260" r:id="Rf43b5e2e80044e4a"/>
+    <p:sldId xmlns:r="http://schemas.openxmlformats.org/officeDocument/2006/relationships" id="261" r:id="Rabeeda8c546c4818"/>
+    <p:sldId xmlns:r="http://schemas.openxmlformats.org/officeDocument/2006/relationships" id="262" r:id="R6b9ec27379204625"/>
+    <p:sldId xmlns:r="http://schemas.openxmlformats.org/officeDocument/2006/relationships" id="263" r:id="R7e02646f19fc480f"/>
+    <p:sldId xmlns:r="http://schemas.openxmlformats.org/officeDocument/2006/relationships" id="264" r:id="Rfef99f4e2b564d47"/>
   </p:sldIdLst>
   <p:sldSz cx="12192000" cy="6858000"/>
   <p:notesSz cx="6858000" cy="9144000"/>
   <p:embeddedFontLst>
     <p:embeddedFont>
       <p:font typeface="JetBrains Mono"/>
-      <p:regular xmlns:r="http://schemas.openxmlformats.org/officeDocument/2006/relationships" r:id="Re76a69b15df84ea2"/>
+      <p:regular xmlns:r="http://schemas.openxmlformats.org/officeDocument/2006/relationships" r:id="Readf6a1e40a141e5"/>
     </p:embeddedFont>
   </p:embeddedFontLst>
 </p:presentation>
@@ -1071,7 +1071,7 @@
           <p:nvPr/>
         </p:nvPicPr>
         <p:blipFill rotWithShape="1">
-          <a:blip xmlns:r="http://schemas.openxmlformats.org/officeDocument/2006/relationships" xmlns:a="http://schemas.openxmlformats.org/drawingml/2006/main" r:embed="R29075f84330d433f"/>
+          <a:blip xmlns:r="http://schemas.openxmlformats.org/officeDocument/2006/relationships" xmlns:a="http://schemas.openxmlformats.org/drawingml/2006/main" r:embed="Rbb7201a67e644fe9"/>
           <a:stretch xmlns:a="http://schemas.openxmlformats.org/drawingml/2006/main"/>
         </p:blipFill>
         <p:spPr>
@@ -1451,7 +1451,7 @@
           <p:nvPr/>
         </p:nvPicPr>
         <p:blipFill rotWithShape="1">
-          <a:blip xmlns:r="http://schemas.openxmlformats.org/officeDocument/2006/relationships" xmlns:a="http://schemas.openxmlformats.org/drawingml/2006/main" r:embed="R2a42ca63870b4fc6">
+          <a:blip xmlns:r="http://schemas.openxmlformats.org/officeDocument/2006/relationships" xmlns:a="http://schemas.openxmlformats.org/drawingml/2006/main" r:embed="Rdf42844cadc84931">
             <a:alphaModFix amt="28000"/>
           </a:blip>
           <a:stretch xmlns:a="http://schemas.openxmlformats.org/drawingml/2006/main"/>
@@ -1664,7 +1664,7 @@
           <p:nvPr/>
         </p:nvPicPr>
         <p:blipFill rotWithShape="1">
-          <a:blip xmlns:r="http://schemas.openxmlformats.org/officeDocument/2006/relationships" xmlns:a="http://schemas.openxmlformats.org/drawingml/2006/main" r:embed="Ra6f592d1d9154c58">
+          <a:blip xmlns:r="http://schemas.openxmlformats.org/officeDocument/2006/relationships" xmlns:a="http://schemas.openxmlformats.org/drawingml/2006/main" r:embed="R94281b7cb9af4795">
             <a:alphaModFix amt="28000"/>
           </a:blip>
           <a:stretch xmlns:a="http://schemas.openxmlformats.org/drawingml/2006/main"/>
@@ -1899,7 +1899,7 @@
           <p:nvPr/>
         </p:nvPicPr>
         <p:blipFill rotWithShape="1">
-          <a:blip xmlns:r="http://schemas.openxmlformats.org/officeDocument/2006/relationships" xmlns:a="http://schemas.openxmlformats.org/drawingml/2006/main" r:embed="R948038b2ee0640b9">
+          <a:blip xmlns:r="http://schemas.openxmlformats.org/officeDocument/2006/relationships" xmlns:a="http://schemas.openxmlformats.org/drawingml/2006/main" r:embed="Rc7ed891296624401">
             <a:alphaModFix amt="28000"/>
           </a:blip>
           <a:stretch xmlns:a="http://schemas.openxmlformats.org/drawingml/2006/main"/>
@@ -2176,7 +2176,7 @@
           <p:nvPr/>
         </p:nvPicPr>
         <p:blipFill rotWithShape="1">
-          <a:blip xmlns:r="http://schemas.openxmlformats.org/officeDocument/2006/relationships" xmlns:a="http://schemas.openxmlformats.org/drawingml/2006/main" r:embed="R75ccf5a2ffa5493c">
+          <a:blip xmlns:r="http://schemas.openxmlformats.org/officeDocument/2006/relationships" xmlns:a="http://schemas.openxmlformats.org/drawingml/2006/main" r:embed="R928618dd947a4b5d">
             <a:alphaModFix amt="28000"/>
           </a:blip>
           <a:stretch xmlns:a="http://schemas.openxmlformats.org/drawingml/2006/main"/>
@@ -2451,7 +2451,7 @@
           <p:nvPr/>
         </p:nvPicPr>
         <p:blipFill rotWithShape="1">
-          <a:blip xmlns:r="http://schemas.openxmlformats.org/officeDocument/2006/relationships" xmlns:a="http://schemas.openxmlformats.org/drawingml/2006/main" r:embed="Raa24f8ecce0e44ae">
+          <a:blip xmlns:r="http://schemas.openxmlformats.org/officeDocument/2006/relationships" xmlns:a="http://schemas.openxmlformats.org/drawingml/2006/main" r:embed="Rdf3c4e32f9694e6e">
             <a:alphaModFix amt="28000"/>
           </a:blip>
           <a:stretch xmlns:a="http://schemas.openxmlformats.org/drawingml/2006/main"/>
@@ -2875,7 +2875,7 @@
           <p:nvPr/>
         </p:nvPicPr>
         <p:blipFill rotWithShape="1">
-          <a:blip xmlns:r="http://schemas.openxmlformats.org/officeDocument/2006/relationships" xmlns:a="http://schemas.openxmlformats.org/drawingml/2006/main" r:embed="Re8887284458b4d6d">
+          <a:blip xmlns:r="http://schemas.openxmlformats.org/officeDocument/2006/relationships" xmlns:a="http://schemas.openxmlformats.org/drawingml/2006/main" r:embed="R56b2f32708f34d9b">
             <a:alphaModFix amt="28000"/>
           </a:blip>
           <a:stretch xmlns:a="http://schemas.openxmlformats.org/drawingml/2006/main"/>
@@ -3016,7 +3016,7 @@
           <p:nvPr/>
         </p:nvPicPr>
         <p:blipFill rotWithShape="1">
-          <a:blip xmlns:r="http://schemas.openxmlformats.org/officeDocument/2006/relationships" xmlns:a="http://schemas.openxmlformats.org/drawingml/2006/main" r:embed="R4b905d1237084427">
+          <a:blip xmlns:r="http://schemas.openxmlformats.org/officeDocument/2006/relationships" xmlns:a="http://schemas.openxmlformats.org/drawingml/2006/main" r:embed="Rfa1a9a2cb9184d61">
             <a:alphaModFix amt="28000"/>
           </a:blip>
           <a:stretch xmlns:a="http://schemas.openxmlformats.org/drawingml/2006/main"/>
@@ -3130,7 +3130,7 @@
           <p:nvPr/>
         </p:nvPicPr>
         <p:blipFill rotWithShape="1">
-          <a:blip xmlns:r="http://schemas.openxmlformats.org/officeDocument/2006/relationships" xmlns:a="http://schemas.openxmlformats.org/drawingml/2006/main" r:embed="Re234562475654fba">
+          <a:blip xmlns:r="http://schemas.openxmlformats.org/officeDocument/2006/relationships" xmlns:a="http://schemas.openxmlformats.org/drawingml/2006/main" r:embed="R5ba3a5f30fe344de">
             <a:alphaModFix amt="28000"/>
           </a:blip>
           <a:stretch xmlns:a="http://schemas.openxmlformats.org/drawingml/2006/main"/>
@@ -3457,7 +3457,7 @@
           <p:nvPr/>
         </p:nvPicPr>
         <p:blipFill rotWithShape="1">
-          <a:blip xmlns:r="http://schemas.openxmlformats.org/officeDocument/2006/relationships" xmlns:a="http://schemas.openxmlformats.org/drawingml/2006/main" r:embed="Rab1f883ca3ca4a86">
+          <a:blip xmlns:r="http://schemas.openxmlformats.org/officeDocument/2006/relationships" xmlns:a="http://schemas.openxmlformats.org/drawingml/2006/main" r:embed="R91724bdc30554a29">
             <a:alphaModFix amt="28000"/>
           </a:blip>
           <a:stretch xmlns:a="http://schemas.openxmlformats.org/drawingml/2006/main"/>
@@ -3745,7 +3745,7 @@
           <p:nvPr/>
         </p:nvPicPr>
         <p:blipFill rotWithShape="1">
-          <a:blip xmlns:r="http://schemas.openxmlformats.org/officeDocument/2006/relationships" xmlns:a="http://schemas.openxmlformats.org/drawingml/2006/main" r:embed="Rb3773ccf1b5f4802">
+          <a:blip xmlns:r="http://schemas.openxmlformats.org/officeDocument/2006/relationships" xmlns:a="http://schemas.openxmlformats.org/drawingml/2006/main" r:embed="Rea34823b9b1e4c9b">
             <a:alphaModFix amt="28000"/>
           </a:blip>
           <a:stretch xmlns:a="http://schemas.openxmlformats.org/drawingml/2006/main"/>
@@ -3982,17 +3982,17 @@
   </p:cSld>
   <p:clrMap bg1="lt1" tx1="dk1" bg2="lt2" tx2="dk2" accent1="accent1" accent2="accent2" accent3="accent3" accent4="accent4" accent5="accent5" accent6="accent6" hlink="hlink" folHlink="folHlink"/>
   <p:sldLayoutIdLst>
-    <p:sldLayoutId xmlns:r="http://schemas.openxmlformats.org/officeDocument/2006/relationships" id="2147483649" r:id="R7f250c32b25e4d8c"/>
-    <p:sldLayoutId xmlns:r="http://schemas.openxmlformats.org/officeDocument/2006/relationships" id="2147483650" r:id="Ra1b30a5b8a1a4f49"/>
-    <p:sldLayoutId xmlns:r="http://schemas.openxmlformats.org/officeDocument/2006/relationships" id="2147483651" r:id="Rc28d0a9f3e054f72"/>
-    <p:sldLayoutId xmlns:r="http://schemas.openxmlformats.org/officeDocument/2006/relationships" id="2147483652" r:id="R6802a12ef8ac4951"/>
-    <p:sldLayoutId xmlns:r="http://schemas.openxmlformats.org/officeDocument/2006/relationships" id="2147483653" r:id="Re18b6f76ca0f407d"/>
-    <p:sldLayoutId xmlns:r="http://schemas.openxmlformats.org/officeDocument/2006/relationships" id="2147483654" r:id="R4afcd7f3e0c24b1d"/>
-    <p:sldLayoutId xmlns:r="http://schemas.openxmlformats.org/officeDocument/2006/relationships" id="2147483655" r:id="R1f5316f272eb4e97"/>
-    <p:sldLayoutId xmlns:r="http://schemas.openxmlformats.org/officeDocument/2006/relationships" id="2147483656" r:id="Rdfa47c3282ee424e"/>
-    <p:sldLayoutId xmlns:r="http://schemas.openxmlformats.org/officeDocument/2006/relationships" id="2147483657" r:id="Rb88e5232b3ab4a7e"/>
-    <p:sldLayoutId xmlns:r="http://schemas.openxmlformats.org/officeDocument/2006/relationships" id="2147483658" r:id="R3b883eea7e214ecb"/>
-    <p:sldLayoutId xmlns:r="http://schemas.openxmlformats.org/officeDocument/2006/relationships" id="2147483659" r:id="R4cbf175e46ec49aa"/>
+    <p:sldLayoutId xmlns:r="http://schemas.openxmlformats.org/officeDocument/2006/relationships" id="2147483649" r:id="Rdae32c398a5442c3"/>
+    <p:sldLayoutId xmlns:r="http://schemas.openxmlformats.org/officeDocument/2006/relationships" id="2147483650" r:id="Rebc92ed0ce6c4aa3"/>
+    <p:sldLayoutId xmlns:r="http://schemas.openxmlformats.org/officeDocument/2006/relationships" id="2147483651" r:id="R5547913fa2644ce1"/>
+    <p:sldLayoutId xmlns:r="http://schemas.openxmlformats.org/officeDocument/2006/relationships" id="2147483652" r:id="R00107d6666fd4ca8"/>
+    <p:sldLayoutId xmlns:r="http://schemas.openxmlformats.org/officeDocument/2006/relationships" id="2147483653" r:id="Rcc6408e3eead4798"/>
+    <p:sldLayoutId xmlns:r="http://schemas.openxmlformats.org/officeDocument/2006/relationships" id="2147483654" r:id="Ra3eb0dd525cf477f"/>
+    <p:sldLayoutId xmlns:r="http://schemas.openxmlformats.org/officeDocument/2006/relationships" id="2147483655" r:id="R1cb4c952765a45dc"/>
+    <p:sldLayoutId xmlns:r="http://schemas.openxmlformats.org/officeDocument/2006/relationships" id="2147483656" r:id="Ra213c5bb645d4cb7"/>
+    <p:sldLayoutId xmlns:r="http://schemas.openxmlformats.org/officeDocument/2006/relationships" id="2147483657" r:id="Rcb09bd90d8b445ea"/>
+    <p:sldLayoutId xmlns:r="http://schemas.openxmlformats.org/officeDocument/2006/relationships" id="2147483658" r:id="R0e3882d2eb9a4d15"/>
+    <p:sldLayoutId xmlns:r="http://schemas.openxmlformats.org/officeDocument/2006/relationships" id="2147483659" r:id="Rd4e372952a0847c5"/>
   </p:sldLayoutIdLst>
   <p:hf hdr="0" ftr="0" dt="0"/>
   <p:txStyles>
@@ -5035,24 +5035,13 @@
             <a:r>
               <a:rPr sz="2400">
                 <a:solidFill>
-                  <a:srgbClr val="080808"/>
-                </a:solidFill>
-                <a:latin typeface="JetBrains Mono"/>
-                <a:ea typeface="JetBrains Mono"/>
-                <a:cs typeface="JetBrains Mono"/>
-              </a:rPr>
-              <a:t>    </a:t>
-            </a:r>
-            <a:r>
-              <a:rPr sz="2400">
-                <a:solidFill>
                   <a:srgbClr val="1750EB"/>
                 </a:solidFill>
                 <a:latin typeface="JetBrains Mono"/>
                 <a:ea typeface="JetBrains Mono"/>
                 <a:cs typeface="JetBrains Mono"/>
               </a:rPr>
-              <a:t>print</a:t>
+              <a:t>    print</a:t>
             </a:r>
             <a:r>
               <a:rPr sz="2400">
@@ -5586,24 +5575,13 @@
             <a:r>
               <a:rPr sz="2400">
                 <a:solidFill>
-                  <a:srgbClr val="080808"/>
-                </a:solidFill>
-                <a:latin typeface="JetBrains Mono"/>
-                <a:ea typeface="JetBrains Mono"/>
-                <a:cs typeface="JetBrains Mono"/>
-              </a:rPr>
-              <a:t>    </a:t>
-            </a:r>
-            <a:r>
-              <a:rPr sz="2400">
-                <a:solidFill>
                   <a:srgbClr val="1750EB"/>
                 </a:solidFill>
                 <a:latin typeface="JetBrains Mono"/>
                 <a:ea typeface="JetBrains Mono"/>
                 <a:cs typeface="JetBrains Mono"/>
               </a:rPr>
-              <a:t>print</a:t>
+              <a:t>    print</a:t>
             </a:r>
             <a:r>
               <a:rPr sz="2400">
@@ -6137,24 +6115,13 @@
             <a:r>
               <a:rPr sz="2400">
                 <a:solidFill>
-                  <a:srgbClr val="080808"/>
-                </a:solidFill>
-                <a:latin typeface="JetBrains Mono"/>
-                <a:ea typeface="JetBrains Mono"/>
-                <a:cs typeface="JetBrains Mono"/>
-              </a:rPr>
-              <a:t>    </a:t>
-            </a:r>
-            <a:r>
-              <a:rPr sz="2400">
-                <a:solidFill>
                   <a:srgbClr val="1750EB"/>
                 </a:solidFill>
                 <a:latin typeface="JetBrains Mono"/>
                 <a:ea typeface="JetBrains Mono"/>
                 <a:cs typeface="JetBrains Mono"/>
               </a:rPr>
-              <a:t>print</a:t>
+              <a:t>    print</a:t>
             </a:r>
             <a:r>
               <a:rPr sz="2400">
@@ -6931,24 +6898,13 @@
             <a:r>
               <a:rPr sz="1600">
                 <a:solidFill>
-                  <a:srgbClr val="080808"/>
-                </a:solidFill>
-                <a:latin typeface="JetBrains Mono"/>
-                <a:ea typeface="JetBrains Mono"/>
-                <a:cs typeface="JetBrains Mono"/>
-              </a:rPr>
-              <a:t>    </a:t>
-            </a:r>
-            <a:r>
-              <a:rPr sz="1600">
-                <a:solidFill>
                   <a:srgbClr val="1750EB"/>
                 </a:solidFill>
                 <a:latin typeface="JetBrains Mono"/>
                 <a:ea typeface="JetBrains Mono"/>
                 <a:cs typeface="JetBrains Mono"/>
               </a:rPr>
-              <a:t>print</a:t>
+              <a:t>    print</a:t>
             </a:r>
             <a:r>
               <a:rPr sz="1600">
@@ -7694,24 +7650,13 @@
             <a:r>
               <a:rPr sz="1600">
                 <a:solidFill>
-                  <a:srgbClr val="080808"/>
-                </a:solidFill>
-                <a:latin typeface="JetBrains Mono"/>
-                <a:ea typeface="JetBrains Mono"/>
-                <a:cs typeface="JetBrains Mono"/>
-              </a:rPr>
-              <a:t>    </a:t>
-            </a:r>
-            <a:r>
-              <a:rPr sz="1600">
-                <a:solidFill>
                   <a:srgbClr val="1750EB"/>
                 </a:solidFill>
                 <a:latin typeface="JetBrains Mono"/>
                 <a:ea typeface="JetBrains Mono"/>
                 <a:cs typeface="JetBrains Mono"/>
               </a:rPr>
-              <a:t>print</a:t>
+              <a:t>    print</a:t>
             </a:r>
             <a:r>
               <a:rPr sz="1600">
@@ -8520,24 +8465,13 @@
             <a:r>
               <a:rPr sz="1600">
                 <a:solidFill>
-                  <a:srgbClr val="080808"/>
-                </a:solidFill>
-                <a:latin typeface="JetBrains Mono"/>
-                <a:ea typeface="JetBrains Mono"/>
-                <a:cs typeface="JetBrains Mono"/>
-              </a:rPr>
-              <a:t>    </a:t>
-            </a:r>
-            <a:r>
-              <a:rPr sz="1600">
-                <a:solidFill>
                   <a:srgbClr val="1750EB"/>
                 </a:solidFill>
                 <a:latin typeface="JetBrains Mono"/>
                 <a:ea typeface="JetBrains Mono"/>
                 <a:cs typeface="JetBrains Mono"/>
               </a:rPr>
-              <a:t>print</a:t>
+              <a:t>    print</a:t>
             </a:r>
             <a:r>
               <a:rPr sz="1600">
@@ -9421,24 +9355,13 @@
             <a:r>
               <a:rPr sz="1600">
                 <a:solidFill>
-                  <a:srgbClr val="080808"/>
-                </a:solidFill>
-                <a:latin typeface="JetBrains Mono"/>
-                <a:ea typeface="JetBrains Mono"/>
-                <a:cs typeface="JetBrains Mono"/>
-              </a:rPr>
-              <a:t>    </a:t>
-            </a:r>
-            <a:r>
-              <a:rPr sz="1600">
-                <a:solidFill>
                   <a:srgbClr val="1750EB"/>
                 </a:solidFill>
                 <a:latin typeface="JetBrains Mono"/>
                 <a:ea typeface="JetBrains Mono"/>
                 <a:cs typeface="JetBrains Mono"/>
               </a:rPr>
-              <a:t>print</a:t>
+              <a:t>    print</a:t>
             </a:r>
             <a:r>
               <a:rPr sz="1600">
@@ -9822,24 +9745,13 @@
             <a:r>
               <a:rPr sz="1800">
                 <a:solidFill>
-                  <a:srgbClr val="080808"/>
-                </a:solidFill>
-                <a:latin typeface="JetBrains Mono"/>
-                <a:ea typeface="JetBrains Mono"/>
-                <a:cs typeface="JetBrains Mono"/>
-              </a:rPr>
-              <a:t>    </a:t>
-            </a:r>
-            <a:r>
-              <a:rPr sz="1800">
-                <a:solidFill>
                   <a:srgbClr val="1750EB"/>
                 </a:solidFill>
                 <a:latin typeface="JetBrains Mono"/>
                 <a:ea typeface="JetBrains Mono"/>
                 <a:cs typeface="JetBrains Mono"/>
               </a:rPr>
-              <a:t>print</a:t>
+              <a:t>    print</a:t>
             </a:r>
             <a:r>
               <a:rPr sz="1800">
